--- a/개인프로젝트_템플릿.pptx
+++ b/개인프로젝트_템플릿.pptx
@@ -243,7 +243,7 @@
           <a:p>
             <a:fld id="{1501327E-1882-4BB9-BDAD-1A6731EEDA67}" type="datetimeFigureOut">
               <a:rPr lang="ko-KR" altLang="en-US" smtClean="0"/>
-              <a:t>2026-04-17</a:t>
+              <a:t>2026-04-18</a:t>
             </a:fld>
             <a:endParaRPr lang="ko-KR" altLang="en-US"/>
           </a:p>
@@ -413,7 +413,7 @@
           <a:p>
             <a:fld id="{1501327E-1882-4BB9-BDAD-1A6731EEDA67}" type="datetimeFigureOut">
               <a:rPr lang="ko-KR" altLang="en-US" smtClean="0"/>
-              <a:t>2026-04-17</a:t>
+              <a:t>2026-04-18</a:t>
             </a:fld>
             <a:endParaRPr lang="ko-KR" altLang="en-US"/>
           </a:p>
@@ -593,7 +593,7 @@
           <a:p>
             <a:fld id="{1501327E-1882-4BB9-BDAD-1A6731EEDA67}" type="datetimeFigureOut">
               <a:rPr lang="ko-KR" altLang="en-US" smtClean="0"/>
-              <a:t>2026-04-17</a:t>
+              <a:t>2026-04-18</a:t>
             </a:fld>
             <a:endParaRPr lang="ko-KR" altLang="en-US"/>
           </a:p>
@@ -763,7 +763,7 @@
           <a:p>
             <a:fld id="{1501327E-1882-4BB9-BDAD-1A6731EEDA67}" type="datetimeFigureOut">
               <a:rPr lang="ko-KR" altLang="en-US" smtClean="0"/>
-              <a:t>2026-04-17</a:t>
+              <a:t>2026-04-18</a:t>
             </a:fld>
             <a:endParaRPr lang="ko-KR" altLang="en-US"/>
           </a:p>
@@ -1009,7 +1009,7 @@
           <a:p>
             <a:fld id="{1501327E-1882-4BB9-BDAD-1A6731EEDA67}" type="datetimeFigureOut">
               <a:rPr lang="ko-KR" altLang="en-US" smtClean="0"/>
-              <a:t>2026-04-17</a:t>
+              <a:t>2026-04-18</a:t>
             </a:fld>
             <a:endParaRPr lang="ko-KR" altLang="en-US"/>
           </a:p>
@@ -1241,7 +1241,7 @@
           <a:p>
             <a:fld id="{1501327E-1882-4BB9-BDAD-1A6731EEDA67}" type="datetimeFigureOut">
               <a:rPr lang="ko-KR" altLang="en-US" smtClean="0"/>
-              <a:t>2026-04-17</a:t>
+              <a:t>2026-04-18</a:t>
             </a:fld>
             <a:endParaRPr lang="ko-KR" altLang="en-US"/>
           </a:p>
@@ -1608,7 +1608,7 @@
           <a:p>
             <a:fld id="{1501327E-1882-4BB9-BDAD-1A6731EEDA67}" type="datetimeFigureOut">
               <a:rPr lang="ko-KR" altLang="en-US" smtClean="0"/>
-              <a:t>2026-04-17</a:t>
+              <a:t>2026-04-18</a:t>
             </a:fld>
             <a:endParaRPr lang="ko-KR" altLang="en-US"/>
           </a:p>
@@ -1726,7 +1726,7 @@
           <a:p>
             <a:fld id="{1501327E-1882-4BB9-BDAD-1A6731EEDA67}" type="datetimeFigureOut">
               <a:rPr lang="ko-KR" altLang="en-US" smtClean="0"/>
-              <a:t>2026-04-17</a:t>
+              <a:t>2026-04-18</a:t>
             </a:fld>
             <a:endParaRPr lang="ko-KR" altLang="en-US"/>
           </a:p>
@@ -1821,7 +1821,7 @@
           <a:p>
             <a:fld id="{1501327E-1882-4BB9-BDAD-1A6731EEDA67}" type="datetimeFigureOut">
               <a:rPr lang="ko-KR" altLang="en-US" smtClean="0"/>
-              <a:t>2026-04-17</a:t>
+              <a:t>2026-04-18</a:t>
             </a:fld>
             <a:endParaRPr lang="ko-KR" altLang="en-US"/>
           </a:p>
@@ -2098,7 +2098,7 @@
           <a:p>
             <a:fld id="{1501327E-1882-4BB9-BDAD-1A6731EEDA67}" type="datetimeFigureOut">
               <a:rPr lang="ko-KR" altLang="en-US" smtClean="0"/>
-              <a:t>2026-04-17</a:t>
+              <a:t>2026-04-18</a:t>
             </a:fld>
             <a:endParaRPr lang="ko-KR" altLang="en-US"/>
           </a:p>
@@ -2355,7 +2355,7 @@
           <a:p>
             <a:fld id="{1501327E-1882-4BB9-BDAD-1A6731EEDA67}" type="datetimeFigureOut">
               <a:rPr lang="ko-KR" altLang="en-US" smtClean="0"/>
-              <a:t>2026-04-17</a:t>
+              <a:t>2026-04-18</a:t>
             </a:fld>
             <a:endParaRPr lang="ko-KR" altLang="en-US"/>
           </a:p>
@@ -2568,7 +2568,7 @@
           <a:p>
             <a:fld id="{1501327E-1882-4BB9-BDAD-1A6731EEDA67}" type="datetimeFigureOut">
               <a:rPr lang="ko-KR" altLang="en-US" smtClean="0"/>
-              <a:t>2026-04-17</a:t>
+              <a:t>2026-04-18</a:t>
             </a:fld>
             <a:endParaRPr lang="ko-KR" altLang="en-US"/>
           </a:p>
@@ -3036,7 +3036,9 @@
               </a:ext>
             </a:extLst>
           </p:cNvPr>
-          <p:cNvSpPr/>
+          <p:cNvSpPr>
+            <a:spLocks noGrp="1" noRot="1" noMove="1" noResize="1" noEditPoints="1" noAdjustHandles="1" noChangeArrowheads="1" noChangeShapeType="1"/>
+          </p:cNvSpPr>
           <p:nvPr/>
         </p:nvSpPr>
         <p:spPr>
@@ -3078,8 +3080,7 @@
           <a:bodyPr rtlCol="0" anchor="ctr"/>
           <a:lstStyle/>
           <a:p>
-            <a:pPr algn="ctr"/>
-            <a:endParaRPr lang="ko-KR" altLang="en-US"/>
+            <a:endParaRPr lang="en-US" altLang="ko-KR" dirty="0"/>
           </a:p>
         </p:txBody>
       </p:sp>
@@ -3337,7 +3338,7 @@
         <p:grpSpPr>
           <a:xfrm>
             <a:off x="170797" y="3475876"/>
-            <a:ext cx="10051461" cy="6734924"/>
+            <a:ext cx="10051461" cy="4850938"/>
             <a:chOff x="170797" y="3475876"/>
             <a:chExt cx="10051461" cy="6734924"/>
           </a:xfrm>
@@ -3412,7 +3413,7 @@
           </p:nvCxnSpPr>
           <p:spPr>
             <a:xfrm>
-              <a:off x="170797" y="4607768"/>
+              <a:off x="170797" y="4933302"/>
               <a:ext cx="10051461" cy="0"/>
             </a:xfrm>
             <a:prstGeom prst="line">
@@ -3453,7 +3454,7 @@
           </p:nvSpPr>
           <p:spPr>
             <a:xfrm>
-              <a:off x="2581627" y="3622168"/>
+              <a:off x="2581626" y="3712851"/>
               <a:ext cx="5229800" cy="839307"/>
             </a:xfrm>
             <a:prstGeom prst="rect">
@@ -3772,8 +3773,8 @@
         </p:nvGrpSpPr>
         <p:grpSpPr>
           <a:xfrm>
-            <a:off x="170797" y="10332599"/>
-            <a:ext cx="10051461" cy="6734924"/>
+            <a:off x="170797" y="8443609"/>
+            <a:ext cx="10051461" cy="8623914"/>
             <a:chOff x="170797" y="3475876"/>
             <a:chExt cx="10051461" cy="6734924"/>
           </a:xfrm>
@@ -3848,7 +3849,7 @@
           </p:nvCxnSpPr>
           <p:spPr>
             <a:xfrm>
-              <a:off x="170797" y="4607768"/>
+              <a:off x="170797" y="4303416"/>
               <a:ext cx="10051461" cy="0"/>
             </a:xfrm>
             <a:prstGeom prst="line">
@@ -3931,8 +3932,8 @@
         </p:nvSpPr>
         <p:spPr>
           <a:xfrm>
-            <a:off x="486694" y="5028249"/>
-            <a:ext cx="9419665" cy="523220"/>
+            <a:off x="300051" y="4750867"/>
+            <a:ext cx="9792949" cy="3108543"/>
           </a:xfrm>
           <a:prstGeom prst="rect">
             <a:avLst/>
@@ -3945,11 +3946,3346 @@
           </a:bodyPr>
           <a:lstStyle/>
           <a:p>
+            <a:pPr algn="just"/>
+            <a:r>
+              <a:rPr lang="en-US" altLang="ko-KR" sz="2800" dirty="0"/>
+              <a:t>[</a:t>
+            </a:r>
+            <a:r>
+              <a:rPr lang="ko-KR" altLang="en-US" sz="2800" dirty="0"/>
+              <a:t>목적</a:t>
+            </a:r>
+            <a:r>
+              <a:rPr lang="en-US" altLang="ko-KR" sz="2800" dirty="0"/>
+              <a:t>]</a:t>
+            </a:r>
+          </a:p>
+          <a:p>
+            <a:pPr algn="just"/>
+            <a:endParaRPr lang="en-US" altLang="ko-KR" sz="2800" dirty="0"/>
+          </a:p>
+          <a:p>
+            <a:pPr algn="just"/>
+            <a:r>
+              <a:rPr lang="en-US" altLang="ko-KR" sz="2800" dirty="0"/>
+              <a:t>[</a:t>
+            </a:r>
+            <a:r>
+              <a:rPr lang="ko-KR" altLang="en-US" sz="2800" dirty="0"/>
+              <a:t>데이터셋</a:t>
+            </a:r>
+            <a:r>
+              <a:rPr lang="en-US" altLang="ko-KR" sz="2800" dirty="0"/>
+              <a:t>]</a:t>
+            </a:r>
+          </a:p>
+          <a:p>
+            <a:pPr algn="just"/>
+            <a:endParaRPr lang="en-US" altLang="ko-KR" sz="2800" dirty="0"/>
+          </a:p>
+          <a:p>
+            <a:pPr algn="just"/>
+            <a:r>
+              <a:rPr lang="en-US" altLang="ko-KR" sz="2800" dirty="0"/>
+              <a:t>[</a:t>
+            </a:r>
             <a:r>
               <a:rPr lang="ko-KR" altLang="en-US" sz="2800" dirty="0" err="1"/>
-              <a:t>가나다라</a:t>
+              <a:t>전처리</a:t>
+            </a:r>
+            <a:r>
+              <a:rPr lang="en-US" altLang="ko-KR" sz="2800" dirty="0"/>
+              <a:t>]</a:t>
+            </a:r>
+          </a:p>
+          <a:p>
+            <a:pPr algn="just"/>
+            <a:endParaRPr lang="en-US" altLang="ko-KR" sz="2800" dirty="0"/>
+          </a:p>
+          <a:p>
+            <a:pPr algn="just"/>
+            <a:r>
+              <a:rPr lang="en-US" altLang="ko-KR" sz="2800" dirty="0"/>
+              <a:t>[</a:t>
+            </a:r>
+            <a:r>
+              <a:rPr lang="ko-KR" altLang="en-US" sz="2800" dirty="0"/>
+              <a:t>라벨</a:t>
+            </a:r>
+            <a:r>
+              <a:rPr lang="en-US" altLang="ko-KR" sz="2800" dirty="0"/>
+              <a:t>]</a:t>
             </a:r>
             <a:endParaRPr lang="ko-KR" altLang="en-US" sz="2800" dirty="0"/>
+          </a:p>
+        </p:txBody>
+      </p:sp>
+      <p:sp>
+        <p:nvSpPr>
+          <p:cNvPr id="17" name="TextBox 16">
+            <a:extLst>
+              <a:ext uri="{FF2B5EF4-FFF2-40B4-BE49-F238E27FC236}">
+                <a16:creationId xmlns:a16="http://schemas.microsoft.com/office/drawing/2014/main" id="{8E808054-891D-CBA4-47A9-C72487252D45}"/>
+              </a:ext>
+            </a:extLst>
+          </p:cNvPr>
+          <p:cNvSpPr txBox="1"/>
+          <p:nvPr/>
+        </p:nvSpPr>
+        <p:spPr>
+          <a:xfrm>
+            <a:off x="10477932" y="26284747"/>
+            <a:ext cx="10634354" cy="2246769"/>
+          </a:xfrm>
+          <a:prstGeom prst="rect">
+            <a:avLst/>
+          </a:prstGeom>
+          <a:noFill/>
+        </p:spPr>
+        <p:txBody>
+          <a:bodyPr wrap="square" rtlCol="0">
+            <a:spAutoFit/>
+          </a:bodyPr>
+          <a:lstStyle/>
+          <a:p>
+            <a:pPr algn="just"/>
+            <a:r>
+              <a:rPr lang="en-US" altLang="ko-KR" sz="2800" dirty="0"/>
+              <a:t>[</a:t>
+            </a:r>
+            <a:r>
+              <a:rPr lang="ko-KR" altLang="en-US" sz="2800" dirty="0"/>
+              <a:t>최고 성능</a:t>
+            </a:r>
+            <a:r>
+              <a:rPr lang="en-US" altLang="ko-KR" sz="2800" dirty="0"/>
+              <a:t>] </a:t>
+            </a:r>
+          </a:p>
+          <a:p>
+            <a:pPr algn="just"/>
+            <a:r>
+              <a:rPr lang="en-US" altLang="ko-KR" sz="2800" dirty="0"/>
+              <a:t>Model: EfficientNet-B0</a:t>
+            </a:r>
+          </a:p>
+          <a:p>
+            <a:pPr algn="just"/>
+            <a:r>
+              <a:rPr lang="en-US" altLang="ko-KR" sz="2800" dirty="0"/>
+              <a:t>Best Config: Adam, </a:t>
+            </a:r>
+            <a:r>
+              <a:rPr lang="en-US" altLang="ko-KR" sz="2800" dirty="0" err="1"/>
+              <a:t>lr</a:t>
+            </a:r>
+            <a:r>
+              <a:rPr lang="en-US" altLang="ko-KR" sz="2800" dirty="0"/>
+              <a:t>=1e-4, epoch=20 </a:t>
+            </a:r>
+          </a:p>
+          <a:p>
+            <a:pPr algn="just"/>
+            <a:r>
+              <a:rPr lang="en-US" altLang="ko-KR" sz="2800" dirty="0"/>
+              <a:t>Test Accuracy: XX.X%</a:t>
+            </a:r>
+          </a:p>
+          <a:p>
+            <a:pPr algn="just"/>
+            <a:r>
+              <a:rPr lang="en-US" altLang="ko-KR" sz="2800" dirty="0"/>
+              <a:t> </a:t>
+            </a:r>
+          </a:p>
+        </p:txBody>
+      </p:sp>
+      <p:sp>
+        <p:nvSpPr>
+          <p:cNvPr id="32" name="TextBox 31">
+            <a:extLst>
+              <a:ext uri="{FF2B5EF4-FFF2-40B4-BE49-F238E27FC236}">
+                <a16:creationId xmlns:a16="http://schemas.microsoft.com/office/drawing/2014/main" id="{ED37C515-6B8F-28D4-FE34-694040921CE1}"/>
+              </a:ext>
+            </a:extLst>
+          </p:cNvPr>
+          <p:cNvSpPr txBox="1"/>
+          <p:nvPr/>
+        </p:nvSpPr>
+        <p:spPr>
+          <a:xfrm>
+            <a:off x="340966" y="9674093"/>
+            <a:ext cx="9792949" cy="7017306"/>
+          </a:xfrm>
+          <a:prstGeom prst="rect">
+            <a:avLst/>
+          </a:prstGeom>
+          <a:noFill/>
+        </p:spPr>
+        <p:txBody>
+          <a:bodyPr wrap="square" rtlCol="0">
+            <a:spAutoFit/>
+          </a:bodyPr>
+          <a:lstStyle/>
+          <a:p>
+            <a:pPr algn="just"/>
+            <a:r>
+              <a:rPr lang="en-US" altLang="ko-KR" sz="2500" dirty="0"/>
+              <a:t>[</a:t>
+            </a:r>
+            <a:r>
+              <a:rPr lang="ko-KR" altLang="en-US" sz="2500" dirty="0"/>
+              <a:t>데이터 </a:t>
+            </a:r>
+            <a:r>
+              <a:rPr lang="ko-KR" altLang="en-US" sz="2500" dirty="0" err="1"/>
+              <a:t>전처리</a:t>
+            </a:r>
+            <a:r>
+              <a:rPr lang="ko-KR" altLang="en-US" sz="2500" dirty="0"/>
+              <a:t> 파이프라인</a:t>
+            </a:r>
+            <a:r>
+              <a:rPr lang="en-US" altLang="ko-KR" sz="2500" dirty="0"/>
+              <a:t>]</a:t>
+            </a:r>
+          </a:p>
+          <a:p>
+            <a:pPr algn="just"/>
+            <a:r>
+              <a:rPr lang="en-US" altLang="ko-KR" sz="2500" dirty="0" err="1"/>
+              <a:t>face_crop</a:t>
+            </a:r>
+            <a:r>
+              <a:rPr lang="en-US" altLang="ko-KR" sz="2500" dirty="0"/>
+              <a:t>, padding, denoise, sharpen </a:t>
+            </a:r>
+          </a:p>
+          <a:p>
+            <a:pPr algn="just"/>
+            <a:endParaRPr lang="ko-KR" altLang="en-US" sz="2500" dirty="0"/>
+          </a:p>
+          <a:p>
+            <a:pPr algn="just"/>
+            <a:r>
+              <a:rPr lang="en-US" altLang="ko-KR" sz="2500" dirty="0"/>
+              <a:t>[</a:t>
+            </a:r>
+            <a:r>
+              <a:rPr lang="ko-KR" altLang="en-US" sz="2500" dirty="0"/>
+              <a:t>데이터 증강 </a:t>
+            </a:r>
+            <a:r>
+              <a:rPr lang="en-US" altLang="ko-KR" sz="2500" dirty="0"/>
+              <a:t>- </a:t>
+            </a:r>
+            <a:r>
+              <a:rPr lang="ko-KR" altLang="en-US" sz="2500" dirty="0"/>
+              <a:t>훈련셋만 적용</a:t>
+            </a:r>
+            <a:r>
+              <a:rPr lang="en-US" altLang="ko-KR" sz="2500" dirty="0"/>
+              <a:t>]</a:t>
+            </a:r>
+          </a:p>
+          <a:p>
+            <a:pPr algn="just"/>
+            <a:r>
+              <a:rPr lang="en-US" altLang="ko-KR" sz="2500" dirty="0" err="1"/>
+              <a:t>RandomHorizontalFlip</a:t>
+            </a:r>
+            <a:r>
+              <a:rPr lang="en-US" altLang="ko-KR" sz="2500" dirty="0"/>
+              <a:t> / </a:t>
+            </a:r>
+            <a:r>
+              <a:rPr lang="en-US" altLang="ko-KR" sz="2500" dirty="0" err="1"/>
+              <a:t>RandomRotation</a:t>
+            </a:r>
+            <a:r>
+              <a:rPr lang="en-US" altLang="ko-KR" sz="2500" dirty="0"/>
+              <a:t>(±15°) /</a:t>
+            </a:r>
+          </a:p>
+          <a:p>
+            <a:pPr algn="just"/>
+            <a:r>
+              <a:rPr lang="en-US" altLang="ko-KR" sz="2500" dirty="0" err="1"/>
+              <a:t>ColorJitter</a:t>
+            </a:r>
+            <a:r>
+              <a:rPr lang="en-US" altLang="ko-KR" sz="2500" dirty="0"/>
+              <a:t> / </a:t>
+            </a:r>
+            <a:r>
+              <a:rPr lang="en-US" altLang="ko-KR" sz="2500" dirty="0" err="1"/>
+              <a:t>RandomAffine</a:t>
+            </a:r>
+            <a:r>
+              <a:rPr lang="en-US" altLang="ko-KR" sz="2500" dirty="0"/>
+              <a:t> / ImageNet </a:t>
+            </a:r>
+            <a:r>
+              <a:rPr lang="ko-KR" altLang="en-US" sz="2500" dirty="0"/>
+              <a:t>정규화</a:t>
+            </a:r>
+          </a:p>
+          <a:p>
+            <a:pPr algn="just"/>
+            <a:r>
+              <a:rPr lang="en-US" altLang="ko-KR" sz="2500" dirty="0"/>
+              <a:t>(μ=0.485/0.456/0.406, σ=0.229/0.224/0.225)</a:t>
+            </a:r>
+          </a:p>
+          <a:p>
+            <a:pPr algn="just"/>
+            <a:endParaRPr lang="en-US" altLang="ko-KR" sz="2500" dirty="0"/>
+          </a:p>
+          <a:p>
+            <a:pPr algn="just"/>
+            <a:r>
+              <a:rPr lang="en-US" altLang="ko-KR" sz="2500" dirty="0"/>
+              <a:t>[</a:t>
+            </a:r>
+            <a:r>
+              <a:rPr lang="ko-KR" altLang="en-US" sz="2500" dirty="0"/>
+              <a:t>모델 구조 </a:t>
+            </a:r>
+            <a:r>
+              <a:rPr lang="en-US" altLang="ko-KR" sz="2500" dirty="0"/>
+              <a:t>- EfficientNet-B0]</a:t>
+            </a:r>
+          </a:p>
+          <a:p>
+            <a:pPr algn="just"/>
+            <a:r>
+              <a:rPr lang="en-US" altLang="ko-KR" sz="2500" dirty="0"/>
+              <a:t>ImageNet pretrained </a:t>
+            </a:r>
+            <a:r>
+              <a:rPr lang="ko-KR" altLang="en-US" sz="2500" dirty="0"/>
+              <a:t>가중치 로드 →마지막 </a:t>
+            </a:r>
+            <a:r>
+              <a:rPr lang="en-US" altLang="ko-KR" sz="2500" dirty="0"/>
+              <a:t>FC </a:t>
+            </a:r>
+            <a:r>
+              <a:rPr lang="ko-KR" altLang="en-US" sz="2500" dirty="0"/>
+              <a:t>레이어를 </a:t>
+            </a:r>
+            <a:r>
+              <a:rPr lang="en-US" altLang="ko-KR" sz="2500" dirty="0"/>
+              <a:t>2-class</a:t>
+            </a:r>
+            <a:r>
+              <a:rPr lang="ko-KR" altLang="en-US" sz="2500" dirty="0"/>
+              <a:t>로 교체 후 전체 </a:t>
+            </a:r>
+            <a:r>
+              <a:rPr lang="en-US" altLang="ko-KR" sz="2500" dirty="0"/>
+              <a:t>fine-tuning</a:t>
+            </a:r>
+          </a:p>
+          <a:p>
+            <a:pPr algn="just"/>
+            <a:r>
+              <a:rPr lang="ko-KR" altLang="en-US" sz="2500" dirty="0"/>
+              <a:t>파라미터 수</a:t>
+            </a:r>
+            <a:r>
+              <a:rPr lang="en-US" altLang="ko-KR" sz="2500" dirty="0"/>
+              <a:t>: </a:t>
+            </a:r>
+            <a:r>
+              <a:rPr lang="ko-KR" altLang="en-US" sz="2500" dirty="0"/>
+              <a:t>약 </a:t>
+            </a:r>
+            <a:r>
+              <a:rPr lang="en-US" altLang="ko-KR" sz="2500" dirty="0"/>
+              <a:t>4M  (</a:t>
+            </a:r>
+            <a:r>
+              <a:rPr lang="en-US" altLang="ko-KR" sz="2500" dirty="0" err="1"/>
+              <a:t>AlexNet</a:t>
+            </a:r>
+            <a:r>
+              <a:rPr lang="en-US" altLang="ko-KR" sz="2500" dirty="0"/>
+              <a:t> 57M </a:t>
+            </a:r>
+            <a:r>
+              <a:rPr lang="ko-KR" altLang="en-US" sz="2500" dirty="0"/>
+              <a:t>대비 약 </a:t>
+            </a:r>
+            <a:r>
+              <a:rPr lang="en-US" altLang="ko-KR" sz="2500" dirty="0"/>
+              <a:t>14</a:t>
+            </a:r>
+            <a:r>
+              <a:rPr lang="ko-KR" altLang="en-US" sz="2500" dirty="0"/>
+              <a:t>배 경량</a:t>
+            </a:r>
+            <a:r>
+              <a:rPr lang="en-US" altLang="ko-KR" sz="2500" dirty="0"/>
+              <a:t>)</a:t>
+            </a:r>
+          </a:p>
+          <a:p>
+            <a:pPr algn="just"/>
+            <a:endParaRPr lang="en-US" altLang="ko-KR" sz="2500" dirty="0"/>
+          </a:p>
+          <a:p>
+            <a:pPr algn="just"/>
+            <a:r>
+              <a:rPr lang="en-US" altLang="ko-KR" sz="2500" dirty="0"/>
+              <a:t>[</a:t>
+            </a:r>
+            <a:r>
+              <a:rPr lang="ko-KR" altLang="en-US" sz="2500" dirty="0" err="1"/>
+              <a:t>하이퍼파라미터</a:t>
+            </a:r>
+            <a:r>
+              <a:rPr lang="ko-KR" altLang="en-US" sz="2500" dirty="0"/>
+              <a:t> 탐색 </a:t>
+            </a:r>
+            <a:r>
+              <a:rPr lang="en-US" altLang="ko-KR" sz="2500" dirty="0"/>
+              <a:t>- Grid Search]</a:t>
+            </a:r>
+          </a:p>
+          <a:p>
+            <a:pPr algn="just"/>
+            <a:r>
+              <a:rPr lang="en-US" altLang="ko-KR" sz="2500" dirty="0"/>
+              <a:t>Optimizer : Adam / SGD</a:t>
+            </a:r>
+          </a:p>
+          <a:p>
+            <a:pPr algn="just"/>
+            <a:r>
+              <a:rPr lang="en-US" altLang="ko-KR" sz="2500" dirty="0"/>
+              <a:t>LR        : 1e-3 / 1e-4 / 1e-5</a:t>
+            </a:r>
+          </a:p>
+          <a:p>
+            <a:pPr algn="just"/>
+            <a:r>
+              <a:rPr lang="en-US" altLang="ko-KR" sz="2500" dirty="0"/>
+              <a:t>Epochs    : 5 / 10 / 15 / 20</a:t>
+            </a:r>
+          </a:p>
+          <a:p>
+            <a:pPr algn="just"/>
+            <a:r>
+              <a:rPr lang="ko-KR" altLang="en-US" sz="2500" dirty="0"/>
+              <a:t>총 </a:t>
+            </a:r>
+            <a:r>
+              <a:rPr lang="en-US" altLang="ko-KR" sz="2500" dirty="0"/>
+              <a:t>24</a:t>
+            </a:r>
+            <a:r>
+              <a:rPr lang="ko-KR" altLang="en-US" sz="2500" dirty="0"/>
+              <a:t>가지 조합 순차 실험 → </a:t>
+            </a:r>
+            <a:r>
+              <a:rPr lang="en-US" altLang="ko-KR" sz="2500" dirty="0"/>
+              <a:t>Best: Adam, </a:t>
+            </a:r>
+            <a:r>
+              <a:rPr lang="en-US" altLang="ko-KR" sz="2500" dirty="0" err="1"/>
+              <a:t>lr</a:t>
+            </a:r>
+            <a:r>
+              <a:rPr lang="en-US" altLang="ko-KR" sz="2500" dirty="0"/>
+              <a:t>=1e-4, epoch=10</a:t>
+            </a:r>
+            <a:endParaRPr lang="ko-KR" altLang="en-US" sz="2500" dirty="0"/>
+          </a:p>
+        </p:txBody>
+      </p:sp>
+      <p:sp>
+        <p:nvSpPr>
+          <p:cNvPr id="33" name="TextBox 32">
+            <a:extLst>
+              <a:ext uri="{FF2B5EF4-FFF2-40B4-BE49-F238E27FC236}">
+                <a16:creationId xmlns:a16="http://schemas.microsoft.com/office/drawing/2014/main" id="{2CC631EC-B41F-2ED0-747F-85C964265FEA}"/>
+              </a:ext>
+            </a:extLst>
+          </p:cNvPr>
+          <p:cNvSpPr txBox="1"/>
+          <p:nvPr/>
+        </p:nvSpPr>
+        <p:spPr>
+          <a:xfrm>
+            <a:off x="429309" y="18672495"/>
+            <a:ext cx="9792949" cy="5863144"/>
+          </a:xfrm>
+          <a:prstGeom prst="rect">
+            <a:avLst/>
+          </a:prstGeom>
+          <a:noFill/>
+        </p:spPr>
+        <p:txBody>
+          <a:bodyPr wrap="square" rtlCol="0">
+            <a:spAutoFit/>
+          </a:bodyPr>
+          <a:lstStyle/>
+          <a:p>
+            <a:pPr algn="just"/>
+            <a:r>
+              <a:rPr lang="en-US" altLang="ko-KR" sz="2500" dirty="0"/>
+              <a:t>[</a:t>
+            </a:r>
+            <a:r>
+              <a:rPr lang="ko-KR" altLang="en-US" sz="2500" dirty="0" err="1"/>
+              <a:t>모델별</a:t>
+            </a:r>
+            <a:r>
+              <a:rPr lang="ko-KR" altLang="en-US" sz="2500" dirty="0"/>
+              <a:t> </a:t>
+            </a:r>
+            <a:r>
+              <a:rPr lang="en-US" altLang="ko-KR" sz="2500" dirty="0"/>
+              <a:t>Test Accuracy </a:t>
+            </a:r>
+            <a:r>
+              <a:rPr lang="ko-KR" altLang="en-US" sz="2500" dirty="0"/>
+              <a:t>비교</a:t>
+            </a:r>
+            <a:r>
+              <a:rPr lang="en-US" altLang="ko-KR" sz="2500" dirty="0"/>
+              <a:t>]</a:t>
+            </a:r>
+          </a:p>
+          <a:p>
+            <a:pPr algn="just"/>
+            <a:r>
+              <a:rPr lang="en-US" altLang="ko-KR" sz="2500" dirty="0"/>
+              <a:t>  </a:t>
+            </a:r>
+            <a:r>
+              <a:rPr lang="en-US" altLang="ko-KR" sz="2500" dirty="0" err="1"/>
+              <a:t>SimpleCNN</a:t>
+            </a:r>
+            <a:r>
+              <a:rPr lang="en-US" altLang="ko-KR" sz="2500" dirty="0"/>
+              <a:t> (</a:t>
+            </a:r>
+            <a:r>
+              <a:rPr lang="en-US" altLang="ko-KR" sz="2500" dirty="0" err="1"/>
+              <a:t>MaxPool+Dropout</a:t>
+            </a:r>
+            <a:r>
+              <a:rPr lang="en-US" altLang="ko-KR" sz="2500" dirty="0"/>
+              <a:t>) : 55.9%</a:t>
+            </a:r>
+          </a:p>
+          <a:p>
+            <a:pPr algn="just"/>
+            <a:r>
+              <a:rPr lang="en-US" altLang="ko-KR" sz="2500" dirty="0"/>
+              <a:t>  </a:t>
+            </a:r>
+            <a:r>
+              <a:rPr lang="en-US" altLang="ko-KR" sz="2500" dirty="0" err="1"/>
+              <a:t>SimpleCNN</a:t>
+            </a:r>
+            <a:r>
+              <a:rPr lang="en-US" altLang="ko-KR" sz="2500" dirty="0"/>
+              <a:t> (</a:t>
+            </a:r>
+            <a:r>
+              <a:rPr lang="en-US" altLang="ko-KR" sz="2500" dirty="0" err="1"/>
+              <a:t>AvgPool</a:t>
+            </a:r>
+            <a:r>
+              <a:rPr lang="en-US" altLang="ko-KR" sz="2500" dirty="0"/>
+              <a:t>)         : 60.7%</a:t>
+            </a:r>
+          </a:p>
+          <a:p>
+            <a:pPr algn="just"/>
+            <a:r>
+              <a:rPr lang="en-US" altLang="ko-KR" sz="2500" dirty="0"/>
+              <a:t>  </a:t>
+            </a:r>
+            <a:r>
+              <a:rPr lang="en-US" altLang="ko-KR" sz="2500" dirty="0" err="1"/>
+              <a:t>AlexNet</a:t>
+            </a:r>
+            <a:r>
+              <a:rPr lang="en-US" altLang="ko-KR" sz="2500" dirty="0"/>
+              <a:t> (baseline)          : 57.3%</a:t>
+            </a:r>
+          </a:p>
+          <a:p>
+            <a:pPr algn="just"/>
+            <a:r>
+              <a:rPr lang="en-US" altLang="ko-KR" sz="2500" dirty="0"/>
+              <a:t>  EfficientNet-B0 (my model)  : 68.4%  ★</a:t>
+            </a:r>
+          </a:p>
+          <a:p>
+            <a:pPr algn="just"/>
+            <a:endParaRPr lang="en-US" altLang="ko-KR" sz="2500" dirty="0"/>
+          </a:p>
+          <a:p>
+            <a:pPr algn="just"/>
+            <a:r>
+              <a:rPr lang="en-US" altLang="ko-KR" sz="2500" dirty="0"/>
+              <a:t>[</a:t>
+            </a:r>
+            <a:r>
+              <a:rPr lang="ko-KR" altLang="en-US" sz="2500" dirty="0" err="1"/>
+              <a:t>하이퍼파라미터</a:t>
+            </a:r>
+            <a:r>
+              <a:rPr lang="ko-KR" altLang="en-US" sz="2500" dirty="0"/>
+              <a:t> 실험 요약</a:t>
+            </a:r>
+            <a:r>
+              <a:rPr lang="en-US" altLang="ko-KR" sz="2500" dirty="0"/>
+              <a:t>]</a:t>
+            </a:r>
+          </a:p>
+          <a:p>
+            <a:pPr algn="just"/>
+            <a:r>
+              <a:rPr lang="en-US" altLang="ko-KR" sz="2500" dirty="0"/>
+              <a:t>  - Adam</a:t>
+            </a:r>
+            <a:r>
+              <a:rPr lang="ko-KR" altLang="en-US" sz="2500" dirty="0"/>
+              <a:t>이 </a:t>
+            </a:r>
+            <a:r>
+              <a:rPr lang="en-US" altLang="ko-KR" sz="2500" dirty="0"/>
+              <a:t>SGD </a:t>
+            </a:r>
+            <a:r>
+              <a:rPr lang="ko-KR" altLang="en-US" sz="2500" dirty="0"/>
+              <a:t>대비 전반적으로 높은 정확도</a:t>
+            </a:r>
+          </a:p>
+          <a:p>
+            <a:pPr algn="just"/>
+            <a:r>
+              <a:rPr lang="ko-KR" altLang="en-US" sz="2500" dirty="0"/>
+              <a:t>  </a:t>
+            </a:r>
+            <a:r>
+              <a:rPr lang="en-US" altLang="ko-KR" sz="2500" dirty="0"/>
+              <a:t>- </a:t>
+            </a:r>
+            <a:r>
+              <a:rPr lang="en-US" altLang="ko-KR" sz="2500" dirty="0" err="1"/>
+              <a:t>lr</a:t>
+            </a:r>
+            <a:r>
+              <a:rPr lang="en-US" altLang="ko-KR" sz="2500" dirty="0"/>
+              <a:t>=1e-4</a:t>
+            </a:r>
+            <a:r>
+              <a:rPr lang="ko-KR" altLang="en-US" sz="2500" dirty="0"/>
+              <a:t>에서 가장 안정적인 수렴</a:t>
+            </a:r>
+          </a:p>
+          <a:p>
+            <a:pPr algn="just"/>
+            <a:r>
+              <a:rPr lang="ko-KR" altLang="en-US" sz="2500" dirty="0"/>
+              <a:t>  </a:t>
+            </a:r>
+            <a:r>
+              <a:rPr lang="en-US" altLang="ko-KR" sz="2500" dirty="0"/>
+              <a:t>- epoch </a:t>
+            </a:r>
+            <a:r>
+              <a:rPr lang="ko-KR" altLang="en-US" sz="2500" dirty="0"/>
+              <a:t>증가에 따른 성능 향상은 </a:t>
+            </a:r>
+            <a:r>
+              <a:rPr lang="en-US" altLang="ko-KR" sz="2500" dirty="0"/>
+              <a:t>10 </a:t>
+            </a:r>
+            <a:r>
+              <a:rPr lang="ko-KR" altLang="en-US" sz="2500" dirty="0"/>
+              <a:t>이후 포화</a:t>
+            </a:r>
+          </a:p>
+          <a:p>
+            <a:pPr algn="just"/>
+            <a:endParaRPr lang="ko-KR" altLang="en-US" sz="2500" dirty="0"/>
+          </a:p>
+          <a:p>
+            <a:pPr algn="just"/>
+            <a:r>
+              <a:rPr lang="en-US" altLang="ko-KR" sz="2500" dirty="0"/>
+              <a:t>[</a:t>
+            </a:r>
+            <a:r>
+              <a:rPr lang="ko-KR" altLang="en-US" sz="2500" dirty="0"/>
+              <a:t>파라미터 수 비교</a:t>
+            </a:r>
+            <a:r>
+              <a:rPr lang="en-US" altLang="ko-KR" sz="2500" dirty="0"/>
+              <a:t>]</a:t>
+            </a:r>
+          </a:p>
+          <a:p>
+            <a:pPr algn="just"/>
+            <a:r>
+              <a:rPr lang="en-US" altLang="ko-KR" sz="2500" dirty="0"/>
+              <a:t>  </a:t>
+            </a:r>
+            <a:r>
+              <a:rPr lang="en-US" altLang="ko-KR" sz="2500" dirty="0" err="1"/>
+              <a:t>SimpleCNN</a:t>
+            </a:r>
+            <a:r>
+              <a:rPr lang="en-US" altLang="ko-KR" sz="2500" dirty="0"/>
+              <a:t> : </a:t>
+            </a:r>
+            <a:r>
+              <a:rPr lang="ko-KR" altLang="en-US" sz="2500" dirty="0"/>
+              <a:t>약 </a:t>
+            </a:r>
+            <a:r>
+              <a:rPr lang="en-US" altLang="ko-KR" sz="2500" dirty="0"/>
+              <a:t>6.5M</a:t>
+            </a:r>
+          </a:p>
+          <a:p>
+            <a:pPr algn="just"/>
+            <a:r>
+              <a:rPr lang="en-US" altLang="ko-KR" sz="2500" dirty="0"/>
+              <a:t>  </a:t>
+            </a:r>
+            <a:r>
+              <a:rPr lang="en-US" altLang="ko-KR" sz="2500" dirty="0" err="1"/>
+              <a:t>AlexNet</a:t>
+            </a:r>
+            <a:r>
+              <a:rPr lang="en-US" altLang="ko-KR" sz="2500" dirty="0"/>
+              <a:t>   : </a:t>
+            </a:r>
+            <a:r>
+              <a:rPr lang="ko-KR" altLang="en-US" sz="2500" dirty="0"/>
+              <a:t>약 </a:t>
+            </a:r>
+            <a:r>
+              <a:rPr lang="en-US" altLang="ko-KR" sz="2500" dirty="0"/>
+              <a:t>57M</a:t>
+            </a:r>
+          </a:p>
+          <a:p>
+            <a:pPr algn="just"/>
+            <a:r>
+              <a:rPr lang="en-US" altLang="ko-KR" sz="2500" dirty="0"/>
+              <a:t>  EfficientNet-B0 : </a:t>
+            </a:r>
+            <a:r>
+              <a:rPr lang="ko-KR" altLang="en-US" sz="2500" dirty="0"/>
+              <a:t>약 </a:t>
+            </a:r>
+            <a:r>
+              <a:rPr lang="en-US" altLang="ko-KR" sz="2500" dirty="0"/>
+              <a:t>4M  ← </a:t>
+            </a:r>
+            <a:r>
+              <a:rPr lang="ko-KR" altLang="en-US" sz="2500" dirty="0"/>
+              <a:t>최소 파라미터</a:t>
+            </a:r>
+            <a:r>
+              <a:rPr lang="en-US" altLang="ko-KR" sz="2500" dirty="0"/>
+              <a:t>, </a:t>
+            </a:r>
+            <a:r>
+              <a:rPr lang="ko-KR" altLang="en-US" sz="2500" dirty="0"/>
+              <a:t>최고 성능</a:t>
+            </a:r>
+          </a:p>
+        </p:txBody>
+      </p:sp>
+      <p:pic>
+        <p:nvPicPr>
+          <p:cNvPr id="37" name="그림 36">
+            <a:extLst>
+              <a:ext uri="{FF2B5EF4-FFF2-40B4-BE49-F238E27FC236}">
+                <a16:creationId xmlns:a16="http://schemas.microsoft.com/office/drawing/2014/main" id="{4B7FB55E-D1A0-AD5E-4365-06BDA9E55DBD}"/>
+              </a:ext>
+            </a:extLst>
+          </p:cNvPr>
+          <p:cNvPicPr>
+            <a:picLocks noChangeAspect="1"/>
+          </p:cNvPicPr>
+          <p:nvPr/>
+        </p:nvPicPr>
+        <p:blipFill>
+          <a:blip r:embed="rId2"/>
+          <a:srcRect r="60728" b="1973"/>
+          <a:stretch>
+            <a:fillRect/>
+          </a:stretch>
+        </p:blipFill>
+        <p:spPr>
+          <a:xfrm>
+            <a:off x="592568" y="25846735"/>
+            <a:ext cx="5227439" cy="3608278"/>
+          </a:xfrm>
+          <a:prstGeom prst="rect">
+            <a:avLst/>
+          </a:prstGeom>
+        </p:spPr>
+      </p:pic>
+      <p:pic>
+        <p:nvPicPr>
+          <p:cNvPr id="41" name="그림 40">
+            <a:extLst>
+              <a:ext uri="{FF2B5EF4-FFF2-40B4-BE49-F238E27FC236}">
+                <a16:creationId xmlns:a16="http://schemas.microsoft.com/office/drawing/2014/main" id="{B335030D-AF03-11A2-FE8E-6360184367FF}"/>
+              </a:ext>
+            </a:extLst>
+          </p:cNvPr>
+          <p:cNvPicPr>
+            <a:picLocks noChangeAspect="1"/>
+          </p:cNvPicPr>
+          <p:nvPr/>
+        </p:nvPicPr>
+        <p:blipFill>
+          <a:blip r:embed="rId3"/>
+          <a:stretch>
+            <a:fillRect/>
+          </a:stretch>
+        </p:blipFill>
+        <p:spPr>
+          <a:xfrm>
+            <a:off x="6692630" y="18672495"/>
+            <a:ext cx="3214695" cy="5431726"/>
+          </a:xfrm>
+          <a:prstGeom prst="rect">
+            <a:avLst/>
+          </a:prstGeom>
+        </p:spPr>
+      </p:pic>
+      <p:sp>
+        <p:nvSpPr>
+          <p:cNvPr id="44" name="TextBox 43">
+            <a:extLst>
+              <a:ext uri="{FF2B5EF4-FFF2-40B4-BE49-F238E27FC236}">
+                <a16:creationId xmlns:a16="http://schemas.microsoft.com/office/drawing/2014/main" id="{A58ADE6B-2299-80E5-8380-02005F960FCC}"/>
+              </a:ext>
+            </a:extLst>
+          </p:cNvPr>
+          <p:cNvSpPr txBox="1"/>
+          <p:nvPr/>
+        </p:nvSpPr>
+        <p:spPr>
+          <a:xfrm>
+            <a:off x="10691811" y="4851262"/>
+            <a:ext cx="9792949" cy="523220"/>
+          </a:xfrm>
+          <a:prstGeom prst="rect">
+            <a:avLst/>
+          </a:prstGeom>
+          <a:noFill/>
+        </p:spPr>
+        <p:txBody>
+          <a:bodyPr wrap="square" rtlCol="0">
+            <a:spAutoFit/>
+          </a:bodyPr>
+          <a:lstStyle/>
+          <a:p>
+            <a:pPr algn="just"/>
+            <a:r>
+              <a:rPr lang="en-US" altLang="ko-KR" sz="2800" b="1" dirty="0">
+                <a:highlight>
+                  <a:srgbClr val="E7F2FF"/>
+                </a:highlight>
+              </a:rPr>
+              <a:t>Part1. Setup – import, seed </a:t>
+            </a:r>
+            <a:r>
+              <a:rPr lang="ko-KR" altLang="en-US" sz="2800" b="1" dirty="0">
+                <a:highlight>
+                  <a:srgbClr val="E7F2FF"/>
+                </a:highlight>
+              </a:rPr>
+              <a:t>고정 등</a:t>
+            </a:r>
+          </a:p>
+        </p:txBody>
+      </p:sp>
+      <p:sp>
+        <p:nvSpPr>
+          <p:cNvPr id="45" name="TextBox 44">
+            <a:extLst>
+              <a:ext uri="{FF2B5EF4-FFF2-40B4-BE49-F238E27FC236}">
+                <a16:creationId xmlns:a16="http://schemas.microsoft.com/office/drawing/2014/main" id="{4CB5F3D2-F590-1555-E144-7A4EA1BA62B3}"/>
+              </a:ext>
+            </a:extLst>
+          </p:cNvPr>
+          <p:cNvSpPr txBox="1"/>
+          <p:nvPr/>
+        </p:nvSpPr>
+        <p:spPr>
+          <a:xfrm>
+            <a:off x="10691809" y="5575100"/>
+            <a:ext cx="9792949" cy="523220"/>
+          </a:xfrm>
+          <a:prstGeom prst="rect">
+            <a:avLst/>
+          </a:prstGeom>
+          <a:noFill/>
+        </p:spPr>
+        <p:txBody>
+          <a:bodyPr wrap="square" rtlCol="0">
+            <a:spAutoFit/>
+          </a:bodyPr>
+          <a:lstStyle/>
+          <a:p>
+            <a:pPr algn="just"/>
+            <a:r>
+              <a:rPr lang="en-US" altLang="ko-KR" sz="2800" b="1" dirty="0">
+                <a:highlight>
+                  <a:srgbClr val="E7F2FF"/>
+                </a:highlight>
+              </a:rPr>
+              <a:t>Part2. </a:t>
+            </a:r>
+            <a:r>
+              <a:rPr lang="ko-KR" altLang="en-US" sz="2800" b="1" dirty="0">
+                <a:highlight>
+                  <a:srgbClr val="E7F2FF"/>
+                </a:highlight>
+              </a:rPr>
+              <a:t>데이터 </a:t>
+            </a:r>
+            <a:r>
+              <a:rPr lang="ko-KR" altLang="en-US" sz="2800" b="1" dirty="0" err="1">
+                <a:highlight>
+                  <a:srgbClr val="E7F2FF"/>
+                </a:highlight>
+              </a:rPr>
+              <a:t>전처리</a:t>
+            </a:r>
+            <a:endParaRPr lang="ko-KR" altLang="en-US" sz="2800" b="1" dirty="0">
+              <a:highlight>
+                <a:srgbClr val="E7F2FF"/>
+              </a:highlight>
+            </a:endParaRPr>
+          </a:p>
+        </p:txBody>
+      </p:sp>
+      <p:sp>
+        <p:nvSpPr>
+          <p:cNvPr id="48" name="TextBox 47">
+            <a:extLst>
+              <a:ext uri="{FF2B5EF4-FFF2-40B4-BE49-F238E27FC236}">
+                <a16:creationId xmlns:a16="http://schemas.microsoft.com/office/drawing/2014/main" id="{572ACE95-8FFB-9A7B-2EFE-293CCFDA55E7}"/>
+              </a:ext>
+            </a:extLst>
+          </p:cNvPr>
+          <p:cNvSpPr txBox="1"/>
+          <p:nvPr/>
+        </p:nvSpPr>
+        <p:spPr>
+          <a:xfrm>
+            <a:off x="10673473" y="10012956"/>
+            <a:ext cx="9792949" cy="523220"/>
+          </a:xfrm>
+          <a:prstGeom prst="rect">
+            <a:avLst/>
+          </a:prstGeom>
+          <a:noFill/>
+        </p:spPr>
+        <p:txBody>
+          <a:bodyPr wrap="square" rtlCol="0">
+            <a:spAutoFit/>
+          </a:bodyPr>
+          <a:lstStyle/>
+          <a:p>
+            <a:pPr algn="just"/>
+            <a:r>
+              <a:rPr lang="en-US" altLang="ko-KR" sz="2800" b="1" dirty="0">
+                <a:highlight>
+                  <a:srgbClr val="E7F2FF"/>
+                </a:highlight>
+              </a:rPr>
+              <a:t>Part3. </a:t>
+            </a:r>
+            <a:r>
+              <a:rPr lang="ko-KR" altLang="en-US" sz="2800" b="1" dirty="0">
+                <a:highlight>
+                  <a:srgbClr val="E7F2FF"/>
+                </a:highlight>
+              </a:rPr>
+              <a:t>모델 정의</a:t>
+            </a:r>
+          </a:p>
+        </p:txBody>
+      </p:sp>
+      <p:sp>
+        <p:nvSpPr>
+          <p:cNvPr id="50" name="TextBox 49">
+            <a:extLst>
+              <a:ext uri="{FF2B5EF4-FFF2-40B4-BE49-F238E27FC236}">
+                <a16:creationId xmlns:a16="http://schemas.microsoft.com/office/drawing/2014/main" id="{8BF7AF02-4828-CE85-44DF-10564166D84F}"/>
+              </a:ext>
+            </a:extLst>
+          </p:cNvPr>
+          <p:cNvSpPr txBox="1"/>
+          <p:nvPr/>
+        </p:nvSpPr>
+        <p:spPr>
+          <a:xfrm>
+            <a:off x="10673473" y="16488521"/>
+            <a:ext cx="10710152" cy="826958"/>
+          </a:xfrm>
+          <a:prstGeom prst="rect">
+            <a:avLst/>
+          </a:prstGeom>
+          <a:noFill/>
+        </p:spPr>
+        <p:txBody>
+          <a:bodyPr wrap="square">
+            <a:spAutoFit/>
+          </a:bodyPr>
+          <a:lstStyle/>
+          <a:p>
+            <a:pPr>
+              <a:lnSpc>
+                <a:spcPts val="1425"/>
+              </a:lnSpc>
+              <a:buNone/>
+            </a:pPr>
+            <a:r>
+              <a:rPr lang="en-US" altLang="ko-KR" b="0" dirty="0" err="1">
+                <a:solidFill>
+                  <a:srgbClr val="C9D1D9"/>
+                </a:solidFill>
+                <a:effectLst/>
+                <a:latin typeface="D2Coding" panose="020B0609020101020101" pitchFamily="49" charset="-127"/>
+                <a:ea typeface="D2Coding" panose="020B0609020101020101" pitchFamily="49" charset="-127"/>
+              </a:rPr>
+              <a:t>e_model</a:t>
+            </a:r>
+            <a:r>
+              <a:rPr lang="en-US" altLang="ko-KR" b="0" dirty="0">
+                <a:solidFill>
+                  <a:srgbClr val="BBBEBF"/>
+                </a:solidFill>
+                <a:effectLst/>
+                <a:latin typeface="D2Coding" panose="020B0609020101020101" pitchFamily="49" charset="-127"/>
+                <a:ea typeface="D2Coding" panose="020B0609020101020101" pitchFamily="49" charset="-127"/>
+              </a:rPr>
+              <a:t> </a:t>
+            </a:r>
+            <a:r>
+              <a:rPr lang="en-US" altLang="ko-KR" b="0" dirty="0">
+                <a:solidFill>
+                  <a:srgbClr val="D4D4D4"/>
+                </a:solidFill>
+                <a:effectLst/>
+                <a:latin typeface="D2Coding" panose="020B0609020101020101" pitchFamily="49" charset="-127"/>
+                <a:ea typeface="D2Coding" panose="020B0609020101020101" pitchFamily="49" charset="-127"/>
+              </a:rPr>
+              <a:t>=</a:t>
+            </a:r>
+            <a:r>
+              <a:rPr lang="en-US" altLang="ko-KR" b="0" dirty="0">
+                <a:solidFill>
+                  <a:srgbClr val="BBBEBF"/>
+                </a:solidFill>
+                <a:effectLst/>
+                <a:latin typeface="D2Coding" panose="020B0609020101020101" pitchFamily="49" charset="-127"/>
+                <a:ea typeface="D2Coding" panose="020B0609020101020101" pitchFamily="49" charset="-127"/>
+              </a:rPr>
+              <a:t> </a:t>
+            </a:r>
+            <a:r>
+              <a:rPr lang="en-US" altLang="ko-KR" b="0" dirty="0">
+                <a:solidFill>
+                  <a:srgbClr val="D2A8FF"/>
+                </a:solidFill>
+                <a:effectLst/>
+                <a:latin typeface="D2Coding" panose="020B0609020101020101" pitchFamily="49" charset="-127"/>
+                <a:ea typeface="D2Coding" panose="020B0609020101020101" pitchFamily="49" charset="-127"/>
+              </a:rPr>
+              <a:t>efficientnet_b0</a:t>
+            </a:r>
+            <a:r>
+              <a:rPr lang="en-US" altLang="ko-KR" b="0" dirty="0">
+                <a:solidFill>
+                  <a:srgbClr val="BBBEBF"/>
+                </a:solidFill>
+                <a:effectLst/>
+                <a:latin typeface="D2Coding" panose="020B0609020101020101" pitchFamily="49" charset="-127"/>
+                <a:ea typeface="D2Coding" panose="020B0609020101020101" pitchFamily="49" charset="-127"/>
+              </a:rPr>
+              <a:t>(</a:t>
+            </a:r>
+            <a:r>
+              <a:rPr lang="en-US" altLang="ko-KR" b="0" dirty="0">
+                <a:solidFill>
+                  <a:srgbClr val="FFA657"/>
+                </a:solidFill>
+                <a:effectLst/>
+                <a:latin typeface="D2Coding" panose="020B0609020101020101" pitchFamily="49" charset="-127"/>
+                <a:ea typeface="D2Coding" panose="020B0609020101020101" pitchFamily="49" charset="-127"/>
+              </a:rPr>
+              <a:t>weights</a:t>
+            </a:r>
+            <a:r>
+              <a:rPr lang="en-US" altLang="ko-KR" b="0" dirty="0">
+                <a:solidFill>
+                  <a:srgbClr val="D4D4D4"/>
+                </a:solidFill>
+                <a:effectLst/>
+                <a:latin typeface="D2Coding" panose="020B0609020101020101" pitchFamily="49" charset="-127"/>
+                <a:ea typeface="D2Coding" panose="020B0609020101020101" pitchFamily="49" charset="-127"/>
+              </a:rPr>
+              <a:t>=</a:t>
+            </a:r>
+            <a:r>
+              <a:rPr lang="en-US" altLang="ko-KR" b="0" dirty="0">
+                <a:solidFill>
+                  <a:srgbClr val="4EC9B0"/>
+                </a:solidFill>
+                <a:effectLst/>
+                <a:latin typeface="D2Coding" panose="020B0609020101020101" pitchFamily="49" charset="-127"/>
+                <a:ea typeface="D2Coding" panose="020B0609020101020101" pitchFamily="49" charset="-127"/>
+              </a:rPr>
+              <a:t>EfficientNet_B0_Weights</a:t>
+            </a:r>
+            <a:r>
+              <a:rPr lang="en-US" altLang="ko-KR" b="0" dirty="0">
+                <a:solidFill>
+                  <a:srgbClr val="BBBEBF"/>
+                </a:solidFill>
+                <a:effectLst/>
+                <a:latin typeface="D2Coding" panose="020B0609020101020101" pitchFamily="49" charset="-127"/>
+                <a:ea typeface="D2Coding" panose="020B0609020101020101" pitchFamily="49" charset="-127"/>
+              </a:rPr>
+              <a:t>.</a:t>
+            </a:r>
+            <a:r>
+              <a:rPr lang="en-US" altLang="ko-KR" b="0" dirty="0">
+                <a:solidFill>
+                  <a:srgbClr val="79C0FF"/>
+                </a:solidFill>
+                <a:effectLst/>
+                <a:latin typeface="D2Coding" panose="020B0609020101020101" pitchFamily="49" charset="-127"/>
+                <a:ea typeface="D2Coding" panose="020B0609020101020101" pitchFamily="49" charset="-127"/>
+              </a:rPr>
+              <a:t>IMAGENET1K_V1</a:t>
+            </a:r>
+            <a:r>
+              <a:rPr lang="en-US" altLang="ko-KR" b="0" dirty="0">
+                <a:solidFill>
+                  <a:srgbClr val="BBBEBF"/>
+                </a:solidFill>
+                <a:effectLst/>
+                <a:latin typeface="D2Coding" panose="020B0609020101020101" pitchFamily="49" charset="-127"/>
+                <a:ea typeface="D2Coding" panose="020B0609020101020101" pitchFamily="49" charset="-127"/>
+              </a:rPr>
+              <a:t>)</a:t>
+            </a:r>
+          </a:p>
+          <a:p>
+            <a:pPr>
+              <a:lnSpc>
+                <a:spcPts val="1425"/>
+              </a:lnSpc>
+              <a:buNone/>
+            </a:pPr>
+            <a:br>
+              <a:rPr lang="en-US" altLang="ko-KR" b="0" dirty="0">
+                <a:solidFill>
+                  <a:srgbClr val="BBBEBF"/>
+                </a:solidFill>
+                <a:effectLst/>
+                <a:latin typeface="D2Coding" panose="020B0609020101020101" pitchFamily="49" charset="-127"/>
+                <a:ea typeface="D2Coding" panose="020B0609020101020101" pitchFamily="49" charset="-127"/>
+              </a:rPr>
+            </a:br>
+            <a:r>
+              <a:rPr lang="en-US" altLang="ko-KR" b="0" dirty="0" err="1">
+                <a:solidFill>
+                  <a:srgbClr val="C9D1D9"/>
+                </a:solidFill>
+                <a:effectLst/>
+                <a:latin typeface="D2Coding" panose="020B0609020101020101" pitchFamily="49" charset="-127"/>
+                <a:ea typeface="D2Coding" panose="020B0609020101020101" pitchFamily="49" charset="-127"/>
+              </a:rPr>
+              <a:t>in_features</a:t>
+            </a:r>
+            <a:r>
+              <a:rPr lang="en-US" altLang="ko-KR" b="0" dirty="0">
+                <a:solidFill>
+                  <a:srgbClr val="BBBEBF"/>
+                </a:solidFill>
+                <a:effectLst/>
+                <a:latin typeface="D2Coding" panose="020B0609020101020101" pitchFamily="49" charset="-127"/>
+                <a:ea typeface="D2Coding" panose="020B0609020101020101" pitchFamily="49" charset="-127"/>
+              </a:rPr>
+              <a:t> </a:t>
+            </a:r>
+            <a:r>
+              <a:rPr lang="en-US" altLang="ko-KR" b="0" dirty="0">
+                <a:solidFill>
+                  <a:srgbClr val="D4D4D4"/>
+                </a:solidFill>
+                <a:effectLst/>
+                <a:latin typeface="D2Coding" panose="020B0609020101020101" pitchFamily="49" charset="-127"/>
+                <a:ea typeface="D2Coding" panose="020B0609020101020101" pitchFamily="49" charset="-127"/>
+              </a:rPr>
+              <a:t>=</a:t>
+            </a:r>
+            <a:r>
+              <a:rPr lang="en-US" altLang="ko-KR" b="0" dirty="0">
+                <a:solidFill>
+                  <a:srgbClr val="BBBEBF"/>
+                </a:solidFill>
+                <a:effectLst/>
+                <a:latin typeface="D2Coding" panose="020B0609020101020101" pitchFamily="49" charset="-127"/>
+                <a:ea typeface="D2Coding" panose="020B0609020101020101" pitchFamily="49" charset="-127"/>
+              </a:rPr>
+              <a:t> </a:t>
+            </a:r>
+            <a:r>
+              <a:rPr lang="en-US" altLang="ko-KR" b="0" dirty="0" err="1">
+                <a:solidFill>
+                  <a:srgbClr val="C9D1D9"/>
+                </a:solidFill>
+                <a:effectLst/>
+                <a:latin typeface="D2Coding" panose="020B0609020101020101" pitchFamily="49" charset="-127"/>
+                <a:ea typeface="D2Coding" panose="020B0609020101020101" pitchFamily="49" charset="-127"/>
+              </a:rPr>
+              <a:t>e_model</a:t>
+            </a:r>
+            <a:r>
+              <a:rPr lang="en-US" altLang="ko-KR" b="0" dirty="0" err="1">
+                <a:solidFill>
+                  <a:srgbClr val="BBBEBF"/>
+                </a:solidFill>
+                <a:effectLst/>
+                <a:latin typeface="D2Coding" panose="020B0609020101020101" pitchFamily="49" charset="-127"/>
+                <a:ea typeface="D2Coding" panose="020B0609020101020101" pitchFamily="49" charset="-127"/>
+              </a:rPr>
+              <a:t>.</a:t>
+            </a:r>
+            <a:r>
+              <a:rPr lang="en-US" altLang="ko-KR" b="0" dirty="0" err="1">
+                <a:solidFill>
+                  <a:srgbClr val="C9D1D9"/>
+                </a:solidFill>
+                <a:effectLst/>
+                <a:latin typeface="D2Coding" panose="020B0609020101020101" pitchFamily="49" charset="-127"/>
+                <a:ea typeface="D2Coding" panose="020B0609020101020101" pitchFamily="49" charset="-127"/>
+              </a:rPr>
+              <a:t>classifier</a:t>
+            </a:r>
+            <a:r>
+              <a:rPr lang="en-US" altLang="ko-KR" b="0" dirty="0">
+                <a:solidFill>
+                  <a:srgbClr val="BBBEBF"/>
+                </a:solidFill>
+                <a:effectLst/>
+                <a:latin typeface="D2Coding" panose="020B0609020101020101" pitchFamily="49" charset="-127"/>
+                <a:ea typeface="D2Coding" panose="020B0609020101020101" pitchFamily="49" charset="-127"/>
+              </a:rPr>
+              <a:t>[</a:t>
+            </a:r>
+            <a:r>
+              <a:rPr lang="en-US" altLang="ko-KR" b="0" dirty="0">
+                <a:solidFill>
+                  <a:srgbClr val="B5CEA8"/>
+                </a:solidFill>
+                <a:effectLst/>
+                <a:latin typeface="D2Coding" panose="020B0609020101020101" pitchFamily="49" charset="-127"/>
+                <a:ea typeface="D2Coding" panose="020B0609020101020101" pitchFamily="49" charset="-127"/>
+              </a:rPr>
+              <a:t>1</a:t>
+            </a:r>
+            <a:r>
+              <a:rPr lang="en-US" altLang="ko-KR" b="0" dirty="0">
+                <a:solidFill>
+                  <a:srgbClr val="BBBEBF"/>
+                </a:solidFill>
+                <a:effectLst/>
+                <a:latin typeface="D2Coding" panose="020B0609020101020101" pitchFamily="49" charset="-127"/>
+                <a:ea typeface="D2Coding" panose="020B0609020101020101" pitchFamily="49" charset="-127"/>
+              </a:rPr>
+              <a:t>].</a:t>
+            </a:r>
+            <a:r>
+              <a:rPr lang="en-US" altLang="ko-KR" b="0" dirty="0" err="1">
+                <a:solidFill>
+                  <a:srgbClr val="BBBEBF"/>
+                </a:solidFill>
+                <a:effectLst/>
+                <a:latin typeface="D2Coding" panose="020B0609020101020101" pitchFamily="49" charset="-127"/>
+                <a:ea typeface="D2Coding" panose="020B0609020101020101" pitchFamily="49" charset="-127"/>
+              </a:rPr>
+              <a:t>in_features</a:t>
+            </a:r>
+            <a:endParaRPr lang="en-US" altLang="ko-KR" b="0" dirty="0">
+              <a:solidFill>
+                <a:srgbClr val="BBBEBF"/>
+              </a:solidFill>
+              <a:effectLst/>
+              <a:latin typeface="D2Coding" panose="020B0609020101020101" pitchFamily="49" charset="-127"/>
+              <a:ea typeface="D2Coding" panose="020B0609020101020101" pitchFamily="49" charset="-127"/>
+            </a:endParaRPr>
+          </a:p>
+          <a:p>
+            <a:pPr>
+              <a:lnSpc>
+                <a:spcPts val="1425"/>
+              </a:lnSpc>
+              <a:buNone/>
+            </a:pPr>
+            <a:r>
+              <a:rPr lang="en-US" altLang="ko-KR" b="0" dirty="0" err="1">
+                <a:solidFill>
+                  <a:srgbClr val="C9D1D9"/>
+                </a:solidFill>
+                <a:effectLst/>
+                <a:latin typeface="D2Coding" panose="020B0609020101020101" pitchFamily="49" charset="-127"/>
+                <a:ea typeface="D2Coding" panose="020B0609020101020101" pitchFamily="49" charset="-127"/>
+              </a:rPr>
+              <a:t>e_model</a:t>
+            </a:r>
+            <a:r>
+              <a:rPr lang="en-US" altLang="ko-KR" b="0" dirty="0" err="1">
+                <a:solidFill>
+                  <a:srgbClr val="BBBEBF"/>
+                </a:solidFill>
+                <a:effectLst/>
+                <a:latin typeface="D2Coding" panose="020B0609020101020101" pitchFamily="49" charset="-127"/>
+                <a:ea typeface="D2Coding" panose="020B0609020101020101" pitchFamily="49" charset="-127"/>
+              </a:rPr>
+              <a:t>.</a:t>
+            </a:r>
+            <a:r>
+              <a:rPr lang="en-US" altLang="ko-KR" b="0" dirty="0" err="1">
+                <a:solidFill>
+                  <a:srgbClr val="C9D1D9"/>
+                </a:solidFill>
+                <a:effectLst/>
+                <a:latin typeface="D2Coding" panose="020B0609020101020101" pitchFamily="49" charset="-127"/>
+                <a:ea typeface="D2Coding" panose="020B0609020101020101" pitchFamily="49" charset="-127"/>
+              </a:rPr>
+              <a:t>classifier</a:t>
+            </a:r>
+            <a:r>
+              <a:rPr lang="en-US" altLang="ko-KR" b="0" dirty="0">
+                <a:solidFill>
+                  <a:srgbClr val="BBBEBF"/>
+                </a:solidFill>
+                <a:effectLst/>
+                <a:latin typeface="D2Coding" panose="020B0609020101020101" pitchFamily="49" charset="-127"/>
+                <a:ea typeface="D2Coding" panose="020B0609020101020101" pitchFamily="49" charset="-127"/>
+              </a:rPr>
+              <a:t>[</a:t>
+            </a:r>
+            <a:r>
+              <a:rPr lang="en-US" altLang="ko-KR" b="0" dirty="0">
+                <a:solidFill>
+                  <a:srgbClr val="B5CEA8"/>
+                </a:solidFill>
+                <a:effectLst/>
+                <a:latin typeface="D2Coding" panose="020B0609020101020101" pitchFamily="49" charset="-127"/>
+                <a:ea typeface="D2Coding" panose="020B0609020101020101" pitchFamily="49" charset="-127"/>
+              </a:rPr>
+              <a:t>1</a:t>
+            </a:r>
+            <a:r>
+              <a:rPr lang="en-US" altLang="ko-KR" b="0" dirty="0">
+                <a:solidFill>
+                  <a:srgbClr val="BBBEBF"/>
+                </a:solidFill>
+                <a:effectLst/>
+                <a:latin typeface="D2Coding" panose="020B0609020101020101" pitchFamily="49" charset="-127"/>
+                <a:ea typeface="D2Coding" panose="020B0609020101020101" pitchFamily="49" charset="-127"/>
+              </a:rPr>
+              <a:t>] </a:t>
+            </a:r>
+            <a:r>
+              <a:rPr lang="en-US" altLang="ko-KR" b="0" dirty="0">
+                <a:solidFill>
+                  <a:srgbClr val="D4D4D4"/>
+                </a:solidFill>
+                <a:effectLst/>
+                <a:latin typeface="D2Coding" panose="020B0609020101020101" pitchFamily="49" charset="-127"/>
+                <a:ea typeface="D2Coding" panose="020B0609020101020101" pitchFamily="49" charset="-127"/>
+              </a:rPr>
+              <a:t>=</a:t>
+            </a:r>
+            <a:r>
+              <a:rPr lang="en-US" altLang="ko-KR" b="0" dirty="0">
+                <a:solidFill>
+                  <a:srgbClr val="BBBEBF"/>
+                </a:solidFill>
+                <a:effectLst/>
+                <a:latin typeface="D2Coding" panose="020B0609020101020101" pitchFamily="49" charset="-127"/>
+                <a:ea typeface="D2Coding" panose="020B0609020101020101" pitchFamily="49" charset="-127"/>
+              </a:rPr>
+              <a:t> </a:t>
+            </a:r>
+            <a:r>
+              <a:rPr lang="en-US" altLang="ko-KR" b="0" dirty="0" err="1">
+                <a:solidFill>
+                  <a:srgbClr val="4EC9B0"/>
+                </a:solidFill>
+                <a:effectLst/>
+                <a:latin typeface="D2Coding" panose="020B0609020101020101" pitchFamily="49" charset="-127"/>
+                <a:ea typeface="D2Coding" panose="020B0609020101020101" pitchFamily="49" charset="-127"/>
+              </a:rPr>
+              <a:t>nn</a:t>
+            </a:r>
+            <a:r>
+              <a:rPr lang="en-US" altLang="ko-KR" b="0" dirty="0" err="1">
+                <a:solidFill>
+                  <a:srgbClr val="BBBEBF"/>
+                </a:solidFill>
+                <a:effectLst/>
+                <a:latin typeface="D2Coding" panose="020B0609020101020101" pitchFamily="49" charset="-127"/>
+                <a:ea typeface="D2Coding" panose="020B0609020101020101" pitchFamily="49" charset="-127"/>
+              </a:rPr>
+              <a:t>.</a:t>
+            </a:r>
+            <a:r>
+              <a:rPr lang="en-US" altLang="ko-KR" b="0" dirty="0" err="1">
+                <a:solidFill>
+                  <a:srgbClr val="4EC9B0"/>
+                </a:solidFill>
+                <a:effectLst/>
+                <a:latin typeface="D2Coding" panose="020B0609020101020101" pitchFamily="49" charset="-127"/>
+                <a:ea typeface="D2Coding" panose="020B0609020101020101" pitchFamily="49" charset="-127"/>
+              </a:rPr>
+              <a:t>Linear</a:t>
+            </a:r>
+            <a:r>
+              <a:rPr lang="en-US" altLang="ko-KR" b="0" dirty="0">
+                <a:solidFill>
+                  <a:srgbClr val="BBBEBF"/>
+                </a:solidFill>
+                <a:effectLst/>
+                <a:latin typeface="D2Coding" panose="020B0609020101020101" pitchFamily="49" charset="-127"/>
+                <a:ea typeface="D2Coding" panose="020B0609020101020101" pitchFamily="49" charset="-127"/>
+              </a:rPr>
+              <a:t>(</a:t>
+            </a:r>
+            <a:r>
+              <a:rPr lang="en-US" altLang="ko-KR" b="0" dirty="0" err="1">
+                <a:solidFill>
+                  <a:srgbClr val="C9D1D9"/>
+                </a:solidFill>
+                <a:effectLst/>
+                <a:latin typeface="D2Coding" panose="020B0609020101020101" pitchFamily="49" charset="-127"/>
+                <a:ea typeface="D2Coding" panose="020B0609020101020101" pitchFamily="49" charset="-127"/>
+              </a:rPr>
+              <a:t>in_features</a:t>
+            </a:r>
+            <a:r>
+              <a:rPr lang="en-US" altLang="ko-KR" b="0" dirty="0">
+                <a:solidFill>
+                  <a:srgbClr val="BBBEBF"/>
+                </a:solidFill>
+                <a:effectLst/>
+                <a:latin typeface="D2Coding" panose="020B0609020101020101" pitchFamily="49" charset="-127"/>
+                <a:ea typeface="D2Coding" panose="020B0609020101020101" pitchFamily="49" charset="-127"/>
+              </a:rPr>
+              <a:t>, </a:t>
+            </a:r>
+            <a:r>
+              <a:rPr lang="en-US" altLang="ko-KR" b="0" dirty="0">
+                <a:solidFill>
+                  <a:srgbClr val="B5CEA8"/>
+                </a:solidFill>
+                <a:effectLst/>
+                <a:latin typeface="D2Coding" panose="020B0609020101020101" pitchFamily="49" charset="-127"/>
+                <a:ea typeface="D2Coding" panose="020B0609020101020101" pitchFamily="49" charset="-127"/>
+              </a:rPr>
+              <a:t>2</a:t>
+            </a:r>
+            <a:r>
+              <a:rPr lang="en-US" altLang="ko-KR" b="0" dirty="0">
+                <a:solidFill>
+                  <a:srgbClr val="BBBEBF"/>
+                </a:solidFill>
+                <a:effectLst/>
+                <a:latin typeface="D2Coding" panose="020B0609020101020101" pitchFamily="49" charset="-127"/>
+                <a:ea typeface="D2Coding" panose="020B0609020101020101" pitchFamily="49" charset="-127"/>
+              </a:rPr>
+              <a:t>)</a:t>
+            </a:r>
+          </a:p>
+        </p:txBody>
+      </p:sp>
+      <p:sp>
+        <p:nvSpPr>
+          <p:cNvPr id="53" name="TextBox 52">
+            <a:extLst>
+              <a:ext uri="{FF2B5EF4-FFF2-40B4-BE49-F238E27FC236}">
+                <a16:creationId xmlns:a16="http://schemas.microsoft.com/office/drawing/2014/main" id="{C6983F08-2C44-3567-2736-E0092E85AA33}"/>
+              </a:ext>
+            </a:extLst>
+          </p:cNvPr>
+          <p:cNvSpPr txBox="1"/>
+          <p:nvPr/>
+        </p:nvSpPr>
+        <p:spPr>
+          <a:xfrm>
+            <a:off x="10691810" y="17662932"/>
+            <a:ext cx="9792949" cy="523220"/>
+          </a:xfrm>
+          <a:prstGeom prst="rect">
+            <a:avLst/>
+          </a:prstGeom>
+          <a:noFill/>
+        </p:spPr>
+        <p:txBody>
+          <a:bodyPr wrap="square" rtlCol="0">
+            <a:spAutoFit/>
+          </a:bodyPr>
+          <a:lstStyle/>
+          <a:p>
+            <a:pPr algn="just"/>
+            <a:r>
+              <a:rPr lang="en-US" altLang="ko-KR" sz="2800" b="1" dirty="0">
+                <a:highlight>
+                  <a:srgbClr val="E7F2FF"/>
+                </a:highlight>
+              </a:rPr>
+              <a:t>Part4. </a:t>
+            </a:r>
+            <a:r>
+              <a:rPr lang="ko-KR" altLang="en-US" sz="2800" b="1" dirty="0">
+                <a:highlight>
+                  <a:srgbClr val="E7F2FF"/>
+                </a:highlight>
+              </a:rPr>
+              <a:t>모델 학습</a:t>
+            </a:r>
+          </a:p>
+        </p:txBody>
+      </p:sp>
+      <p:sp>
+        <p:nvSpPr>
+          <p:cNvPr id="54" name="TextBox 53">
+            <a:extLst>
+              <a:ext uri="{FF2B5EF4-FFF2-40B4-BE49-F238E27FC236}">
+                <a16:creationId xmlns:a16="http://schemas.microsoft.com/office/drawing/2014/main" id="{94B45EBF-D5DC-1CD7-F68B-1719AC9170DD}"/>
+              </a:ext>
+            </a:extLst>
+          </p:cNvPr>
+          <p:cNvSpPr txBox="1"/>
+          <p:nvPr/>
+        </p:nvSpPr>
+        <p:spPr>
+          <a:xfrm>
+            <a:off x="10691809" y="23328883"/>
+            <a:ext cx="9792949" cy="523220"/>
+          </a:xfrm>
+          <a:prstGeom prst="rect">
+            <a:avLst/>
+          </a:prstGeom>
+          <a:noFill/>
+        </p:spPr>
+        <p:txBody>
+          <a:bodyPr wrap="square" rtlCol="0">
+            <a:spAutoFit/>
+          </a:bodyPr>
+          <a:lstStyle/>
+          <a:p>
+            <a:pPr algn="just"/>
+            <a:r>
+              <a:rPr lang="en-US" altLang="ko-KR" sz="2800" b="1" dirty="0">
+                <a:highlight>
+                  <a:srgbClr val="E7F2FF"/>
+                </a:highlight>
+              </a:rPr>
+              <a:t>Part5. </a:t>
+            </a:r>
+            <a:r>
+              <a:rPr lang="ko-KR" altLang="en-US" sz="2800" b="1" dirty="0">
+                <a:highlight>
+                  <a:srgbClr val="E7F2FF"/>
+                </a:highlight>
+              </a:rPr>
+              <a:t>시각화</a:t>
+            </a:r>
+          </a:p>
+        </p:txBody>
+      </p:sp>
+      <p:sp>
+        <p:nvSpPr>
+          <p:cNvPr id="58" name="TextBox 57">
+            <a:extLst>
+              <a:ext uri="{FF2B5EF4-FFF2-40B4-BE49-F238E27FC236}">
+                <a16:creationId xmlns:a16="http://schemas.microsoft.com/office/drawing/2014/main" id="{B242C86E-CF2E-EDCA-7157-0602360D61BD}"/>
+              </a:ext>
+            </a:extLst>
+          </p:cNvPr>
+          <p:cNvSpPr txBox="1"/>
+          <p:nvPr/>
+        </p:nvSpPr>
+        <p:spPr>
+          <a:xfrm>
+            <a:off x="10691809" y="6312907"/>
+            <a:ext cx="3855203" cy="2862322"/>
+          </a:xfrm>
+          <a:prstGeom prst="rect">
+            <a:avLst/>
+          </a:prstGeom>
+          <a:noFill/>
+        </p:spPr>
+        <p:txBody>
+          <a:bodyPr wrap="square">
+            <a:spAutoFit/>
+          </a:bodyPr>
+          <a:lstStyle/>
+          <a:p>
+            <a:pPr>
+              <a:buNone/>
+            </a:pPr>
+            <a:r>
+              <a:rPr lang="en-US" altLang="ko-KR" sz="2000" b="0" dirty="0">
+                <a:solidFill>
+                  <a:srgbClr val="0000FF"/>
+                </a:solidFill>
+                <a:effectLst/>
+                <a:latin typeface="D2Coding" panose="020B0609020101020101" pitchFamily="49" charset="-127"/>
+                <a:ea typeface="D2Coding" panose="020B0609020101020101" pitchFamily="49" charset="-127"/>
+              </a:rPr>
+              <a:t>def</a:t>
+            </a:r>
+            <a:r>
+              <a:rPr lang="en-US" altLang="ko-KR" sz="2000" b="0" dirty="0">
+                <a:solidFill>
+                  <a:srgbClr val="000000"/>
+                </a:solidFill>
+                <a:effectLst/>
+                <a:latin typeface="D2Coding" panose="020B0609020101020101" pitchFamily="49" charset="-127"/>
+                <a:ea typeface="D2Coding" panose="020B0609020101020101" pitchFamily="49" charset="-127"/>
+              </a:rPr>
+              <a:t> </a:t>
+            </a:r>
+            <a:r>
+              <a:rPr lang="en-US" altLang="ko-KR" sz="2000" b="0" dirty="0" err="1">
+                <a:solidFill>
+                  <a:srgbClr val="000000"/>
+                </a:solidFill>
+                <a:effectLst/>
+                <a:latin typeface="D2Coding" panose="020B0609020101020101" pitchFamily="49" charset="-127"/>
+                <a:ea typeface="D2Coding" panose="020B0609020101020101" pitchFamily="49" charset="-127"/>
+              </a:rPr>
+              <a:t>pipeline_D</a:t>
+            </a:r>
+            <a:r>
+              <a:rPr lang="en-US" altLang="ko-KR" sz="2000" b="0" dirty="0">
+                <a:solidFill>
+                  <a:srgbClr val="000000"/>
+                </a:solidFill>
+                <a:effectLst/>
+                <a:latin typeface="D2Coding" panose="020B0609020101020101" pitchFamily="49" charset="-127"/>
+                <a:ea typeface="D2Coding" panose="020B0609020101020101" pitchFamily="49" charset="-127"/>
+              </a:rPr>
+              <a:t>(path):</a:t>
+            </a:r>
+          </a:p>
+          <a:p>
+            <a:pPr>
+              <a:buNone/>
+            </a:pPr>
+            <a:r>
+              <a:rPr lang="en-US" altLang="ko-KR" sz="2000" b="0" dirty="0">
+                <a:solidFill>
+                  <a:srgbClr val="000000"/>
+                </a:solidFill>
+                <a:effectLst/>
+                <a:latin typeface="D2Coding" panose="020B0609020101020101" pitchFamily="49" charset="-127"/>
+                <a:ea typeface="D2Coding" panose="020B0609020101020101" pitchFamily="49" charset="-127"/>
+              </a:rPr>
+              <a:t>    </a:t>
+            </a:r>
+            <a:r>
+              <a:rPr lang="en-US" altLang="ko-KR" sz="2000" b="0" dirty="0" err="1">
+                <a:solidFill>
+                  <a:srgbClr val="000000"/>
+                </a:solidFill>
+                <a:effectLst/>
+                <a:latin typeface="D2Coding" panose="020B0609020101020101" pitchFamily="49" charset="-127"/>
+                <a:ea typeface="D2Coding" panose="020B0609020101020101" pitchFamily="49" charset="-127"/>
+              </a:rPr>
+              <a:t>img</a:t>
+            </a:r>
+            <a:r>
+              <a:rPr lang="en-US" altLang="ko-KR" sz="2000" b="0" dirty="0">
+                <a:solidFill>
+                  <a:srgbClr val="000000"/>
+                </a:solidFill>
+                <a:effectLst/>
+                <a:latin typeface="D2Coding" panose="020B0609020101020101" pitchFamily="49" charset="-127"/>
+                <a:ea typeface="D2Coding" panose="020B0609020101020101" pitchFamily="49" charset="-127"/>
+              </a:rPr>
+              <a:t> = </a:t>
+            </a:r>
+            <a:r>
+              <a:rPr lang="en-US" altLang="ko-KR" sz="2000" b="0" dirty="0" err="1">
+                <a:solidFill>
+                  <a:srgbClr val="000000"/>
+                </a:solidFill>
+                <a:effectLst/>
+                <a:latin typeface="D2Coding" panose="020B0609020101020101" pitchFamily="49" charset="-127"/>
+                <a:ea typeface="D2Coding" panose="020B0609020101020101" pitchFamily="49" charset="-127"/>
+              </a:rPr>
+              <a:t>load_image</a:t>
+            </a:r>
+            <a:r>
+              <a:rPr lang="en-US" altLang="ko-KR" sz="2000" b="0" dirty="0">
+                <a:solidFill>
+                  <a:srgbClr val="000000"/>
+                </a:solidFill>
+                <a:effectLst/>
+                <a:latin typeface="D2Coding" panose="020B0609020101020101" pitchFamily="49" charset="-127"/>
+                <a:ea typeface="D2Coding" panose="020B0609020101020101" pitchFamily="49" charset="-127"/>
+              </a:rPr>
+              <a:t>(path)</a:t>
+            </a:r>
+          </a:p>
+          <a:p>
+            <a:pPr>
+              <a:buNone/>
+            </a:pPr>
+            <a:r>
+              <a:rPr lang="en-US" altLang="ko-KR" sz="2000" b="0" dirty="0">
+                <a:solidFill>
+                  <a:srgbClr val="000000"/>
+                </a:solidFill>
+                <a:effectLst/>
+                <a:latin typeface="D2Coding" panose="020B0609020101020101" pitchFamily="49" charset="-127"/>
+                <a:ea typeface="D2Coding" panose="020B0609020101020101" pitchFamily="49" charset="-127"/>
+              </a:rPr>
+              <a:t>    </a:t>
+            </a:r>
+            <a:r>
+              <a:rPr lang="en-US" altLang="ko-KR" sz="2000" b="0" dirty="0">
+                <a:solidFill>
+                  <a:srgbClr val="0000FF"/>
+                </a:solidFill>
+                <a:effectLst/>
+                <a:latin typeface="D2Coding" panose="020B0609020101020101" pitchFamily="49" charset="-127"/>
+                <a:ea typeface="D2Coding" panose="020B0609020101020101" pitchFamily="49" charset="-127"/>
+              </a:rPr>
+              <a:t>if</a:t>
+            </a:r>
+            <a:r>
+              <a:rPr lang="en-US" altLang="ko-KR" sz="2000" b="0" dirty="0">
+                <a:solidFill>
+                  <a:srgbClr val="000000"/>
+                </a:solidFill>
+                <a:effectLst/>
+                <a:latin typeface="D2Coding" panose="020B0609020101020101" pitchFamily="49" charset="-127"/>
+                <a:ea typeface="D2Coding" panose="020B0609020101020101" pitchFamily="49" charset="-127"/>
+              </a:rPr>
+              <a:t> </a:t>
+            </a:r>
+            <a:r>
+              <a:rPr lang="en-US" altLang="ko-KR" sz="2000" b="0" dirty="0" err="1">
+                <a:solidFill>
+                  <a:srgbClr val="000000"/>
+                </a:solidFill>
+                <a:effectLst/>
+                <a:latin typeface="D2Coding" panose="020B0609020101020101" pitchFamily="49" charset="-127"/>
+                <a:ea typeface="D2Coding" panose="020B0609020101020101" pitchFamily="49" charset="-127"/>
+              </a:rPr>
+              <a:t>img</a:t>
+            </a:r>
+            <a:r>
+              <a:rPr lang="en-US" altLang="ko-KR" sz="2000" b="0" dirty="0">
+                <a:solidFill>
+                  <a:srgbClr val="000000"/>
+                </a:solidFill>
+                <a:effectLst/>
+                <a:latin typeface="D2Coding" panose="020B0609020101020101" pitchFamily="49" charset="-127"/>
+                <a:ea typeface="D2Coding" panose="020B0609020101020101" pitchFamily="49" charset="-127"/>
+              </a:rPr>
+              <a:t> </a:t>
+            </a:r>
+            <a:r>
+              <a:rPr lang="en-US" altLang="ko-KR" sz="2000" b="0" dirty="0">
+                <a:solidFill>
+                  <a:srgbClr val="0000FF"/>
+                </a:solidFill>
+                <a:effectLst/>
+                <a:latin typeface="D2Coding" panose="020B0609020101020101" pitchFamily="49" charset="-127"/>
+                <a:ea typeface="D2Coding" panose="020B0609020101020101" pitchFamily="49" charset="-127"/>
+              </a:rPr>
+              <a:t>is</a:t>
+            </a:r>
+            <a:r>
+              <a:rPr lang="en-US" altLang="ko-KR" sz="2000" b="0" dirty="0">
+                <a:solidFill>
+                  <a:srgbClr val="000000"/>
+                </a:solidFill>
+                <a:effectLst/>
+                <a:latin typeface="D2Coding" panose="020B0609020101020101" pitchFamily="49" charset="-127"/>
+                <a:ea typeface="D2Coding" panose="020B0609020101020101" pitchFamily="49" charset="-127"/>
+              </a:rPr>
+              <a:t> </a:t>
+            </a:r>
+            <a:r>
+              <a:rPr lang="en-US" altLang="ko-KR" sz="2000" b="0" dirty="0">
+                <a:solidFill>
+                  <a:srgbClr val="0000FF"/>
+                </a:solidFill>
+                <a:effectLst/>
+                <a:latin typeface="D2Coding" panose="020B0609020101020101" pitchFamily="49" charset="-127"/>
+                <a:ea typeface="D2Coding" panose="020B0609020101020101" pitchFamily="49" charset="-127"/>
+              </a:rPr>
+              <a:t>None</a:t>
+            </a:r>
+            <a:r>
+              <a:rPr lang="en-US" altLang="ko-KR" sz="2000" b="0" dirty="0">
+                <a:solidFill>
+                  <a:srgbClr val="000000"/>
+                </a:solidFill>
+                <a:effectLst/>
+                <a:latin typeface="D2Coding" panose="020B0609020101020101" pitchFamily="49" charset="-127"/>
+                <a:ea typeface="D2Coding" panose="020B0609020101020101" pitchFamily="49" charset="-127"/>
+              </a:rPr>
+              <a:t>:</a:t>
+            </a:r>
+          </a:p>
+          <a:p>
+            <a:pPr>
+              <a:buNone/>
+            </a:pPr>
+            <a:r>
+              <a:rPr lang="en-US" altLang="ko-KR" sz="2000" b="0" dirty="0">
+                <a:solidFill>
+                  <a:srgbClr val="000000"/>
+                </a:solidFill>
+                <a:effectLst/>
+                <a:latin typeface="D2Coding" panose="020B0609020101020101" pitchFamily="49" charset="-127"/>
+                <a:ea typeface="D2Coding" panose="020B0609020101020101" pitchFamily="49" charset="-127"/>
+              </a:rPr>
+              <a:t>        </a:t>
+            </a:r>
+            <a:r>
+              <a:rPr lang="en-US" altLang="ko-KR" sz="2000" b="0" dirty="0">
+                <a:solidFill>
+                  <a:srgbClr val="0000FF"/>
+                </a:solidFill>
+                <a:effectLst/>
+                <a:latin typeface="D2Coding" panose="020B0609020101020101" pitchFamily="49" charset="-127"/>
+                <a:ea typeface="D2Coding" panose="020B0609020101020101" pitchFamily="49" charset="-127"/>
+              </a:rPr>
+              <a:t>return</a:t>
+            </a:r>
+            <a:r>
+              <a:rPr lang="en-US" altLang="ko-KR" sz="2000" b="0" dirty="0">
+                <a:solidFill>
+                  <a:srgbClr val="000000"/>
+                </a:solidFill>
+                <a:effectLst/>
+                <a:latin typeface="D2Coding" panose="020B0609020101020101" pitchFamily="49" charset="-127"/>
+                <a:ea typeface="D2Coding" panose="020B0609020101020101" pitchFamily="49" charset="-127"/>
+              </a:rPr>
+              <a:t> </a:t>
+            </a:r>
+            <a:r>
+              <a:rPr lang="en-US" altLang="ko-KR" sz="2000" b="0" dirty="0">
+                <a:solidFill>
+                  <a:srgbClr val="0000FF"/>
+                </a:solidFill>
+                <a:effectLst/>
+                <a:latin typeface="D2Coding" panose="020B0609020101020101" pitchFamily="49" charset="-127"/>
+                <a:ea typeface="D2Coding" panose="020B0609020101020101" pitchFamily="49" charset="-127"/>
+              </a:rPr>
+              <a:t>None</a:t>
+            </a:r>
+            <a:endParaRPr lang="en-US" altLang="ko-KR" sz="2000" b="0" dirty="0">
+              <a:solidFill>
+                <a:srgbClr val="000000"/>
+              </a:solidFill>
+              <a:effectLst/>
+              <a:latin typeface="D2Coding" panose="020B0609020101020101" pitchFamily="49" charset="-127"/>
+              <a:ea typeface="D2Coding" panose="020B0609020101020101" pitchFamily="49" charset="-127"/>
+            </a:endParaRPr>
+          </a:p>
+          <a:p>
+            <a:pPr>
+              <a:buNone/>
+            </a:pPr>
+            <a:r>
+              <a:rPr lang="en-US" altLang="ko-KR" sz="2000" b="0" dirty="0">
+                <a:solidFill>
+                  <a:srgbClr val="000000"/>
+                </a:solidFill>
+                <a:effectLst/>
+                <a:latin typeface="D2Coding" panose="020B0609020101020101" pitchFamily="49" charset="-127"/>
+                <a:ea typeface="D2Coding" panose="020B0609020101020101" pitchFamily="49" charset="-127"/>
+              </a:rPr>
+              <a:t>    </a:t>
+            </a:r>
+            <a:r>
+              <a:rPr lang="en-US" altLang="ko-KR" sz="2000" b="0" dirty="0" err="1">
+                <a:solidFill>
+                  <a:srgbClr val="000000"/>
+                </a:solidFill>
+                <a:effectLst/>
+                <a:latin typeface="D2Coding" panose="020B0609020101020101" pitchFamily="49" charset="-127"/>
+                <a:ea typeface="D2Coding" panose="020B0609020101020101" pitchFamily="49" charset="-127"/>
+              </a:rPr>
+              <a:t>img</a:t>
+            </a:r>
+            <a:r>
+              <a:rPr lang="en-US" altLang="ko-KR" sz="2000" b="0" dirty="0">
+                <a:solidFill>
+                  <a:srgbClr val="000000"/>
+                </a:solidFill>
+                <a:effectLst/>
+                <a:latin typeface="D2Coding" panose="020B0609020101020101" pitchFamily="49" charset="-127"/>
+                <a:ea typeface="D2Coding" panose="020B0609020101020101" pitchFamily="49" charset="-127"/>
+              </a:rPr>
+              <a:t> = </a:t>
+            </a:r>
+            <a:r>
+              <a:rPr lang="en-US" altLang="ko-KR" sz="2000" b="0" dirty="0" err="1">
+                <a:solidFill>
+                  <a:srgbClr val="000000"/>
+                </a:solidFill>
+                <a:effectLst/>
+                <a:latin typeface="D2Coding" panose="020B0609020101020101" pitchFamily="49" charset="-127"/>
+                <a:ea typeface="D2Coding" panose="020B0609020101020101" pitchFamily="49" charset="-127"/>
+              </a:rPr>
+              <a:t>face_crop</a:t>
+            </a:r>
+            <a:r>
+              <a:rPr lang="en-US" altLang="ko-KR" sz="2000" b="0" dirty="0">
+                <a:solidFill>
+                  <a:srgbClr val="000000"/>
+                </a:solidFill>
+                <a:effectLst/>
+                <a:latin typeface="D2Coding" panose="020B0609020101020101" pitchFamily="49" charset="-127"/>
+                <a:ea typeface="D2Coding" panose="020B0609020101020101" pitchFamily="49" charset="-127"/>
+              </a:rPr>
+              <a:t>(</a:t>
+            </a:r>
+            <a:r>
+              <a:rPr lang="en-US" altLang="ko-KR" sz="2000" b="0" dirty="0" err="1">
+                <a:solidFill>
+                  <a:srgbClr val="000000"/>
+                </a:solidFill>
+                <a:effectLst/>
+                <a:latin typeface="D2Coding" panose="020B0609020101020101" pitchFamily="49" charset="-127"/>
+                <a:ea typeface="D2Coding" panose="020B0609020101020101" pitchFamily="49" charset="-127"/>
+              </a:rPr>
+              <a:t>img</a:t>
+            </a:r>
+            <a:r>
+              <a:rPr lang="en-US" altLang="ko-KR" sz="2000" b="0" dirty="0">
+                <a:solidFill>
+                  <a:srgbClr val="000000"/>
+                </a:solidFill>
+                <a:effectLst/>
+                <a:latin typeface="D2Coding" panose="020B0609020101020101" pitchFamily="49" charset="-127"/>
+                <a:ea typeface="D2Coding" panose="020B0609020101020101" pitchFamily="49" charset="-127"/>
+              </a:rPr>
+              <a:t>)</a:t>
+            </a:r>
+          </a:p>
+          <a:p>
+            <a:pPr>
+              <a:buNone/>
+            </a:pPr>
+            <a:r>
+              <a:rPr lang="en-US" altLang="ko-KR" sz="2000" b="0" dirty="0">
+                <a:solidFill>
+                  <a:srgbClr val="000000"/>
+                </a:solidFill>
+                <a:effectLst/>
+                <a:latin typeface="D2Coding" panose="020B0609020101020101" pitchFamily="49" charset="-127"/>
+                <a:ea typeface="D2Coding" panose="020B0609020101020101" pitchFamily="49" charset="-127"/>
+              </a:rPr>
+              <a:t>    </a:t>
+            </a:r>
+            <a:r>
+              <a:rPr lang="en-US" altLang="ko-KR" sz="2000" b="0" dirty="0" err="1">
+                <a:solidFill>
+                  <a:srgbClr val="000000"/>
+                </a:solidFill>
+                <a:effectLst/>
+                <a:latin typeface="D2Coding" panose="020B0609020101020101" pitchFamily="49" charset="-127"/>
+                <a:ea typeface="D2Coding" panose="020B0609020101020101" pitchFamily="49" charset="-127"/>
+              </a:rPr>
+              <a:t>img</a:t>
+            </a:r>
+            <a:r>
+              <a:rPr lang="en-US" altLang="ko-KR" sz="2000" b="0" dirty="0">
+                <a:solidFill>
+                  <a:srgbClr val="000000"/>
+                </a:solidFill>
+                <a:effectLst/>
+                <a:latin typeface="D2Coding" panose="020B0609020101020101" pitchFamily="49" charset="-127"/>
+                <a:ea typeface="D2Coding" panose="020B0609020101020101" pitchFamily="49" charset="-127"/>
+              </a:rPr>
+              <a:t> = </a:t>
+            </a:r>
+            <a:r>
+              <a:rPr lang="en-US" altLang="ko-KR" sz="2000" b="0" dirty="0" err="1">
+                <a:solidFill>
+                  <a:srgbClr val="000000"/>
+                </a:solidFill>
+                <a:effectLst/>
+                <a:latin typeface="D2Coding" panose="020B0609020101020101" pitchFamily="49" charset="-127"/>
+                <a:ea typeface="D2Coding" panose="020B0609020101020101" pitchFamily="49" charset="-127"/>
+              </a:rPr>
+              <a:t>pad_img</a:t>
+            </a:r>
+            <a:r>
+              <a:rPr lang="en-US" altLang="ko-KR" sz="2000" b="0" dirty="0">
+                <a:solidFill>
+                  <a:srgbClr val="000000"/>
+                </a:solidFill>
+                <a:effectLst/>
+                <a:latin typeface="D2Coding" panose="020B0609020101020101" pitchFamily="49" charset="-127"/>
+                <a:ea typeface="D2Coding" panose="020B0609020101020101" pitchFamily="49" charset="-127"/>
+              </a:rPr>
+              <a:t>(</a:t>
+            </a:r>
+            <a:r>
+              <a:rPr lang="en-US" altLang="ko-KR" sz="2000" b="0" dirty="0" err="1">
+                <a:solidFill>
+                  <a:srgbClr val="000000"/>
+                </a:solidFill>
+                <a:effectLst/>
+                <a:latin typeface="D2Coding" panose="020B0609020101020101" pitchFamily="49" charset="-127"/>
+                <a:ea typeface="D2Coding" panose="020B0609020101020101" pitchFamily="49" charset="-127"/>
+              </a:rPr>
+              <a:t>img</a:t>
+            </a:r>
+            <a:r>
+              <a:rPr lang="en-US" altLang="ko-KR" sz="2000" b="0" dirty="0">
+                <a:solidFill>
+                  <a:srgbClr val="000000"/>
+                </a:solidFill>
+                <a:effectLst/>
+                <a:latin typeface="D2Coding" panose="020B0609020101020101" pitchFamily="49" charset="-127"/>
+                <a:ea typeface="D2Coding" panose="020B0609020101020101" pitchFamily="49" charset="-127"/>
+              </a:rPr>
+              <a:t>)</a:t>
+            </a:r>
+          </a:p>
+          <a:p>
+            <a:pPr>
+              <a:buNone/>
+            </a:pPr>
+            <a:r>
+              <a:rPr lang="en-US" altLang="ko-KR" sz="2000" b="0" dirty="0">
+                <a:solidFill>
+                  <a:srgbClr val="000000"/>
+                </a:solidFill>
+                <a:effectLst/>
+                <a:latin typeface="D2Coding" panose="020B0609020101020101" pitchFamily="49" charset="-127"/>
+                <a:ea typeface="D2Coding" panose="020B0609020101020101" pitchFamily="49" charset="-127"/>
+              </a:rPr>
+              <a:t>    </a:t>
+            </a:r>
+            <a:r>
+              <a:rPr lang="en-US" altLang="ko-KR" sz="2000" b="0" dirty="0" err="1">
+                <a:solidFill>
+                  <a:srgbClr val="000000"/>
+                </a:solidFill>
+                <a:effectLst/>
+                <a:latin typeface="D2Coding" panose="020B0609020101020101" pitchFamily="49" charset="-127"/>
+                <a:ea typeface="D2Coding" panose="020B0609020101020101" pitchFamily="49" charset="-127"/>
+              </a:rPr>
+              <a:t>img</a:t>
+            </a:r>
+            <a:r>
+              <a:rPr lang="en-US" altLang="ko-KR" sz="2000" b="0" dirty="0">
+                <a:solidFill>
+                  <a:srgbClr val="000000"/>
+                </a:solidFill>
+                <a:effectLst/>
+                <a:latin typeface="D2Coding" panose="020B0609020101020101" pitchFamily="49" charset="-127"/>
+                <a:ea typeface="D2Coding" panose="020B0609020101020101" pitchFamily="49" charset="-127"/>
+              </a:rPr>
+              <a:t> = </a:t>
+            </a:r>
+            <a:r>
+              <a:rPr lang="en-US" altLang="ko-KR" sz="2000" b="0" dirty="0" err="1">
+                <a:solidFill>
+                  <a:srgbClr val="000000"/>
+                </a:solidFill>
+                <a:effectLst/>
+                <a:latin typeface="D2Coding" panose="020B0609020101020101" pitchFamily="49" charset="-127"/>
+                <a:ea typeface="D2Coding" panose="020B0609020101020101" pitchFamily="49" charset="-127"/>
+              </a:rPr>
+              <a:t>denoise_img</a:t>
+            </a:r>
+            <a:r>
+              <a:rPr lang="en-US" altLang="ko-KR" sz="2000" b="0" dirty="0">
+                <a:solidFill>
+                  <a:srgbClr val="000000"/>
+                </a:solidFill>
+                <a:effectLst/>
+                <a:latin typeface="D2Coding" panose="020B0609020101020101" pitchFamily="49" charset="-127"/>
+                <a:ea typeface="D2Coding" panose="020B0609020101020101" pitchFamily="49" charset="-127"/>
+              </a:rPr>
+              <a:t>(</a:t>
+            </a:r>
+            <a:r>
+              <a:rPr lang="en-US" altLang="ko-KR" sz="2000" b="0" dirty="0" err="1">
+                <a:solidFill>
+                  <a:srgbClr val="000000"/>
+                </a:solidFill>
+                <a:effectLst/>
+                <a:latin typeface="D2Coding" panose="020B0609020101020101" pitchFamily="49" charset="-127"/>
+                <a:ea typeface="D2Coding" panose="020B0609020101020101" pitchFamily="49" charset="-127"/>
+              </a:rPr>
+              <a:t>img</a:t>
+            </a:r>
+            <a:r>
+              <a:rPr lang="en-US" altLang="ko-KR" sz="2000" b="0" dirty="0">
+                <a:solidFill>
+                  <a:srgbClr val="000000"/>
+                </a:solidFill>
+                <a:effectLst/>
+                <a:latin typeface="D2Coding" panose="020B0609020101020101" pitchFamily="49" charset="-127"/>
+                <a:ea typeface="D2Coding" panose="020B0609020101020101" pitchFamily="49" charset="-127"/>
+              </a:rPr>
+              <a:t>)</a:t>
+            </a:r>
+          </a:p>
+          <a:p>
+            <a:pPr>
+              <a:buNone/>
+            </a:pPr>
+            <a:r>
+              <a:rPr lang="en-US" altLang="ko-KR" sz="2000" b="0" dirty="0">
+                <a:solidFill>
+                  <a:srgbClr val="000000"/>
+                </a:solidFill>
+                <a:effectLst/>
+                <a:latin typeface="D2Coding" panose="020B0609020101020101" pitchFamily="49" charset="-127"/>
+                <a:ea typeface="D2Coding" panose="020B0609020101020101" pitchFamily="49" charset="-127"/>
+              </a:rPr>
+              <a:t>    </a:t>
+            </a:r>
+            <a:r>
+              <a:rPr lang="en-US" altLang="ko-KR" sz="2000" b="0" dirty="0" err="1">
+                <a:solidFill>
+                  <a:srgbClr val="000000"/>
+                </a:solidFill>
+                <a:effectLst/>
+                <a:latin typeface="D2Coding" panose="020B0609020101020101" pitchFamily="49" charset="-127"/>
+                <a:ea typeface="D2Coding" panose="020B0609020101020101" pitchFamily="49" charset="-127"/>
+              </a:rPr>
+              <a:t>img</a:t>
+            </a:r>
+            <a:r>
+              <a:rPr lang="en-US" altLang="ko-KR" sz="2000" b="0" dirty="0">
+                <a:solidFill>
+                  <a:srgbClr val="000000"/>
+                </a:solidFill>
+                <a:effectLst/>
+                <a:latin typeface="D2Coding" panose="020B0609020101020101" pitchFamily="49" charset="-127"/>
+                <a:ea typeface="D2Coding" panose="020B0609020101020101" pitchFamily="49" charset="-127"/>
+              </a:rPr>
+              <a:t> = </a:t>
+            </a:r>
+            <a:r>
+              <a:rPr lang="en-US" altLang="ko-KR" sz="2000" b="0" dirty="0" err="1">
+                <a:solidFill>
+                  <a:srgbClr val="000000"/>
+                </a:solidFill>
+                <a:effectLst/>
+                <a:latin typeface="D2Coding" panose="020B0609020101020101" pitchFamily="49" charset="-127"/>
+                <a:ea typeface="D2Coding" panose="020B0609020101020101" pitchFamily="49" charset="-127"/>
+              </a:rPr>
+              <a:t>sharpen_img</a:t>
+            </a:r>
+            <a:r>
+              <a:rPr lang="en-US" altLang="ko-KR" sz="2000" b="0" dirty="0">
+                <a:solidFill>
+                  <a:srgbClr val="000000"/>
+                </a:solidFill>
+                <a:effectLst/>
+                <a:latin typeface="D2Coding" panose="020B0609020101020101" pitchFamily="49" charset="-127"/>
+                <a:ea typeface="D2Coding" panose="020B0609020101020101" pitchFamily="49" charset="-127"/>
+              </a:rPr>
+              <a:t>(</a:t>
+            </a:r>
+            <a:r>
+              <a:rPr lang="en-US" altLang="ko-KR" sz="2000" b="0" dirty="0" err="1">
+                <a:solidFill>
+                  <a:srgbClr val="000000"/>
+                </a:solidFill>
+                <a:effectLst/>
+                <a:latin typeface="D2Coding" panose="020B0609020101020101" pitchFamily="49" charset="-127"/>
+                <a:ea typeface="D2Coding" panose="020B0609020101020101" pitchFamily="49" charset="-127"/>
+              </a:rPr>
+              <a:t>img</a:t>
+            </a:r>
+            <a:r>
+              <a:rPr lang="en-US" altLang="ko-KR" sz="2000" b="0" dirty="0">
+                <a:solidFill>
+                  <a:srgbClr val="000000"/>
+                </a:solidFill>
+                <a:effectLst/>
+                <a:latin typeface="D2Coding" panose="020B0609020101020101" pitchFamily="49" charset="-127"/>
+                <a:ea typeface="D2Coding" panose="020B0609020101020101" pitchFamily="49" charset="-127"/>
+              </a:rPr>
+              <a:t>)</a:t>
+            </a:r>
+          </a:p>
+          <a:p>
+            <a:pPr>
+              <a:buNone/>
+            </a:pPr>
+            <a:r>
+              <a:rPr lang="ko-KR" altLang="en-US" sz="2000" b="0" dirty="0">
+                <a:solidFill>
+                  <a:srgbClr val="000000"/>
+                </a:solidFill>
+                <a:effectLst/>
+                <a:latin typeface="D2Coding" panose="020B0609020101020101" pitchFamily="49" charset="-127"/>
+                <a:ea typeface="D2Coding" panose="020B0609020101020101" pitchFamily="49" charset="-127"/>
+              </a:rPr>
+              <a:t>    </a:t>
+            </a:r>
+            <a:r>
+              <a:rPr lang="en-US" altLang="ko-KR" sz="2000" b="0" dirty="0">
+                <a:solidFill>
+                  <a:srgbClr val="0000FF"/>
+                </a:solidFill>
+                <a:effectLst/>
+                <a:latin typeface="D2Coding" panose="020B0609020101020101" pitchFamily="49" charset="-127"/>
+                <a:ea typeface="D2Coding" panose="020B0609020101020101" pitchFamily="49" charset="-127"/>
+              </a:rPr>
+              <a:t>return</a:t>
+            </a:r>
+            <a:r>
+              <a:rPr lang="en-US" altLang="ko-KR" sz="2000" b="0" dirty="0">
+                <a:solidFill>
+                  <a:srgbClr val="000000"/>
+                </a:solidFill>
+                <a:effectLst/>
+                <a:latin typeface="D2Coding" panose="020B0609020101020101" pitchFamily="49" charset="-127"/>
+                <a:ea typeface="D2Coding" panose="020B0609020101020101" pitchFamily="49" charset="-127"/>
+              </a:rPr>
+              <a:t> </a:t>
+            </a:r>
+            <a:r>
+              <a:rPr lang="en-US" altLang="ko-KR" sz="2000" b="0" dirty="0" err="1">
+                <a:solidFill>
+                  <a:srgbClr val="000000"/>
+                </a:solidFill>
+                <a:effectLst/>
+                <a:latin typeface="D2Coding" panose="020B0609020101020101" pitchFamily="49" charset="-127"/>
+                <a:ea typeface="D2Coding" panose="020B0609020101020101" pitchFamily="49" charset="-127"/>
+              </a:rPr>
+              <a:t>img</a:t>
+            </a:r>
+            <a:endParaRPr lang="en-US" altLang="ko-KR" sz="2000" b="0" dirty="0">
+              <a:solidFill>
+                <a:srgbClr val="000000"/>
+              </a:solidFill>
+              <a:effectLst/>
+              <a:latin typeface="D2Coding" panose="020B0609020101020101" pitchFamily="49" charset="-127"/>
+              <a:ea typeface="D2Coding" panose="020B0609020101020101" pitchFamily="49" charset="-127"/>
+            </a:endParaRPr>
+          </a:p>
+        </p:txBody>
+      </p:sp>
+      <p:sp>
+        <p:nvSpPr>
+          <p:cNvPr id="60" name="TextBox 59">
+            <a:extLst>
+              <a:ext uri="{FF2B5EF4-FFF2-40B4-BE49-F238E27FC236}">
+                <a16:creationId xmlns:a16="http://schemas.microsoft.com/office/drawing/2014/main" id="{030B29AC-2D1D-8657-0B11-5A5230B7C96A}"/>
+              </a:ext>
+            </a:extLst>
+          </p:cNvPr>
+          <p:cNvSpPr txBox="1"/>
+          <p:nvPr/>
+        </p:nvSpPr>
+        <p:spPr>
+          <a:xfrm>
+            <a:off x="14293455" y="6297368"/>
+            <a:ext cx="6749204" cy="4154984"/>
+          </a:xfrm>
+          <a:prstGeom prst="rect">
+            <a:avLst/>
+          </a:prstGeom>
+          <a:noFill/>
+        </p:spPr>
+        <p:txBody>
+          <a:bodyPr wrap="square">
+            <a:spAutoFit/>
+          </a:bodyPr>
+          <a:lstStyle/>
+          <a:p>
+            <a:pPr>
+              <a:buNone/>
+            </a:pPr>
+            <a:r>
+              <a:rPr lang="en-US" altLang="ko-KR" sz="2000" b="0" dirty="0" err="1">
+                <a:solidFill>
+                  <a:srgbClr val="000000"/>
+                </a:solidFill>
+                <a:effectLst/>
+                <a:latin typeface="D2Coding" panose="020B0609020101020101" pitchFamily="49" charset="-127"/>
+                <a:ea typeface="D2Coding" panose="020B0609020101020101" pitchFamily="49" charset="-127"/>
+              </a:rPr>
+              <a:t>train_transforms</a:t>
+            </a:r>
+            <a:r>
+              <a:rPr lang="en-US" altLang="ko-KR" sz="2000" b="0" dirty="0">
+                <a:solidFill>
+                  <a:srgbClr val="000000"/>
+                </a:solidFill>
+                <a:effectLst/>
+                <a:latin typeface="D2Coding" panose="020B0609020101020101" pitchFamily="49" charset="-127"/>
+                <a:ea typeface="D2Coding" panose="020B0609020101020101" pitchFamily="49" charset="-127"/>
+              </a:rPr>
+              <a:t> = </a:t>
+            </a:r>
+            <a:r>
+              <a:rPr lang="en-US" altLang="ko-KR" sz="2000" b="0" dirty="0" err="1">
+                <a:solidFill>
+                  <a:srgbClr val="000000"/>
+                </a:solidFill>
+                <a:effectLst/>
+                <a:latin typeface="D2Coding" panose="020B0609020101020101" pitchFamily="49" charset="-127"/>
+                <a:ea typeface="D2Coding" panose="020B0609020101020101" pitchFamily="49" charset="-127"/>
+              </a:rPr>
+              <a:t>transforms.Compose</a:t>
+            </a:r>
+            <a:r>
+              <a:rPr lang="en-US" altLang="ko-KR" sz="2000" b="0" dirty="0">
+                <a:solidFill>
+                  <a:srgbClr val="000000"/>
+                </a:solidFill>
+                <a:effectLst/>
+                <a:latin typeface="D2Coding" panose="020B0609020101020101" pitchFamily="49" charset="-127"/>
+                <a:ea typeface="D2Coding" panose="020B0609020101020101" pitchFamily="49" charset="-127"/>
+              </a:rPr>
+              <a:t>([</a:t>
+            </a:r>
+          </a:p>
+          <a:p>
+            <a:pPr>
+              <a:buNone/>
+            </a:pPr>
+            <a:r>
+              <a:rPr lang="en-US" altLang="ko-KR" sz="2000" b="0" dirty="0">
+                <a:solidFill>
+                  <a:srgbClr val="000000"/>
+                </a:solidFill>
+                <a:effectLst/>
+                <a:latin typeface="D2Coding" panose="020B0609020101020101" pitchFamily="49" charset="-127"/>
+                <a:ea typeface="D2Coding" panose="020B0609020101020101" pitchFamily="49" charset="-127"/>
+              </a:rPr>
+              <a:t>    </a:t>
+            </a:r>
+            <a:r>
+              <a:rPr lang="en-US" altLang="ko-KR" sz="2000" b="0" dirty="0" err="1">
+                <a:solidFill>
+                  <a:srgbClr val="000000"/>
+                </a:solidFill>
+                <a:effectLst/>
+                <a:latin typeface="D2Coding" panose="020B0609020101020101" pitchFamily="49" charset="-127"/>
+                <a:ea typeface="D2Coding" panose="020B0609020101020101" pitchFamily="49" charset="-127"/>
+              </a:rPr>
+              <a:t>transforms.ToPILImage</a:t>
+            </a:r>
+            <a:r>
+              <a:rPr lang="en-US" altLang="ko-KR" sz="2000" b="0" dirty="0">
+                <a:solidFill>
+                  <a:srgbClr val="000000"/>
+                </a:solidFill>
+                <a:effectLst/>
+                <a:latin typeface="D2Coding" panose="020B0609020101020101" pitchFamily="49" charset="-127"/>
+                <a:ea typeface="D2Coding" panose="020B0609020101020101" pitchFamily="49" charset="-127"/>
+              </a:rPr>
+              <a:t>(),</a:t>
+            </a:r>
+          </a:p>
+          <a:p>
+            <a:pPr>
+              <a:buNone/>
+            </a:pPr>
+            <a:r>
+              <a:rPr lang="en-US" altLang="ko-KR" sz="2000" b="0" dirty="0">
+                <a:solidFill>
+                  <a:srgbClr val="000000"/>
+                </a:solidFill>
+                <a:effectLst/>
+                <a:latin typeface="D2Coding" panose="020B0609020101020101" pitchFamily="49" charset="-127"/>
+                <a:ea typeface="D2Coding" panose="020B0609020101020101" pitchFamily="49" charset="-127"/>
+              </a:rPr>
+              <a:t>    </a:t>
+            </a:r>
+            <a:r>
+              <a:rPr lang="en-US" altLang="ko-KR" sz="2000" b="0" dirty="0" err="1">
+                <a:solidFill>
+                  <a:srgbClr val="000000"/>
+                </a:solidFill>
+                <a:effectLst/>
+                <a:latin typeface="D2Coding" panose="020B0609020101020101" pitchFamily="49" charset="-127"/>
+                <a:ea typeface="D2Coding" panose="020B0609020101020101" pitchFamily="49" charset="-127"/>
+              </a:rPr>
+              <a:t>transforms.RandomHorizontalFlip</a:t>
+            </a:r>
+            <a:r>
+              <a:rPr lang="en-US" altLang="ko-KR" sz="2000" b="0" dirty="0">
+                <a:solidFill>
+                  <a:srgbClr val="000000"/>
+                </a:solidFill>
+                <a:effectLst/>
+                <a:latin typeface="D2Coding" panose="020B0609020101020101" pitchFamily="49" charset="-127"/>
+                <a:ea typeface="D2Coding" panose="020B0609020101020101" pitchFamily="49" charset="-127"/>
+              </a:rPr>
+              <a:t>(p=</a:t>
+            </a:r>
+            <a:r>
+              <a:rPr lang="en-US" altLang="ko-KR" sz="2000" b="0" dirty="0">
+                <a:solidFill>
+                  <a:srgbClr val="098658"/>
+                </a:solidFill>
+                <a:effectLst/>
+                <a:latin typeface="D2Coding" panose="020B0609020101020101" pitchFamily="49" charset="-127"/>
+                <a:ea typeface="D2Coding" panose="020B0609020101020101" pitchFamily="49" charset="-127"/>
+              </a:rPr>
+              <a:t>0.5</a:t>
+            </a:r>
+            <a:r>
+              <a:rPr lang="en-US" altLang="ko-KR" sz="2000" b="0" dirty="0">
+                <a:solidFill>
+                  <a:srgbClr val="000000"/>
+                </a:solidFill>
+                <a:effectLst/>
+                <a:latin typeface="D2Coding" panose="020B0609020101020101" pitchFamily="49" charset="-127"/>
+                <a:ea typeface="D2Coding" panose="020B0609020101020101" pitchFamily="49" charset="-127"/>
+              </a:rPr>
+              <a:t>), </a:t>
+            </a:r>
+            <a:endParaRPr lang="ko-KR" altLang="en-US" sz="2000" b="0" dirty="0">
+              <a:solidFill>
+                <a:srgbClr val="000000"/>
+              </a:solidFill>
+              <a:effectLst/>
+              <a:latin typeface="D2Coding" panose="020B0609020101020101" pitchFamily="49" charset="-127"/>
+              <a:ea typeface="D2Coding" panose="020B0609020101020101" pitchFamily="49" charset="-127"/>
+            </a:endParaRPr>
+          </a:p>
+          <a:p>
+            <a:pPr>
+              <a:buNone/>
+            </a:pPr>
+            <a:r>
+              <a:rPr lang="ko-KR" altLang="en-US" sz="2000" b="0" dirty="0">
+                <a:solidFill>
+                  <a:srgbClr val="000000"/>
+                </a:solidFill>
+                <a:effectLst/>
+                <a:latin typeface="D2Coding" panose="020B0609020101020101" pitchFamily="49" charset="-127"/>
+                <a:ea typeface="D2Coding" panose="020B0609020101020101" pitchFamily="49" charset="-127"/>
+              </a:rPr>
+              <a:t>    </a:t>
+            </a:r>
+            <a:r>
+              <a:rPr lang="en-US" altLang="ko-KR" sz="2000" b="0" dirty="0" err="1">
+                <a:solidFill>
+                  <a:srgbClr val="000000"/>
+                </a:solidFill>
+                <a:effectLst/>
+                <a:latin typeface="D2Coding" panose="020B0609020101020101" pitchFamily="49" charset="-127"/>
+                <a:ea typeface="D2Coding" panose="020B0609020101020101" pitchFamily="49" charset="-127"/>
+              </a:rPr>
+              <a:t>transforms.RandomRotation</a:t>
+            </a:r>
+            <a:r>
+              <a:rPr lang="en-US" altLang="ko-KR" sz="2000" b="0" dirty="0">
+                <a:solidFill>
+                  <a:srgbClr val="000000"/>
+                </a:solidFill>
+                <a:effectLst/>
+                <a:latin typeface="D2Coding" panose="020B0609020101020101" pitchFamily="49" charset="-127"/>
+                <a:ea typeface="D2Coding" panose="020B0609020101020101" pitchFamily="49" charset="-127"/>
+              </a:rPr>
+              <a:t>(degrees=</a:t>
+            </a:r>
+            <a:r>
+              <a:rPr lang="en-US" altLang="ko-KR" sz="2000" b="0" dirty="0">
+                <a:solidFill>
+                  <a:srgbClr val="098658"/>
+                </a:solidFill>
+                <a:effectLst/>
+                <a:latin typeface="D2Coding" panose="020B0609020101020101" pitchFamily="49" charset="-127"/>
+                <a:ea typeface="D2Coding" panose="020B0609020101020101" pitchFamily="49" charset="-127"/>
+              </a:rPr>
+              <a:t>15</a:t>
+            </a:r>
+            <a:r>
+              <a:rPr lang="en-US" altLang="ko-KR" sz="2000" b="0" dirty="0">
+                <a:solidFill>
+                  <a:srgbClr val="000000"/>
+                </a:solidFill>
+                <a:effectLst/>
+                <a:latin typeface="D2Coding" panose="020B0609020101020101" pitchFamily="49" charset="-127"/>
+                <a:ea typeface="D2Coding" panose="020B0609020101020101" pitchFamily="49" charset="-127"/>
+              </a:rPr>
+              <a:t>),</a:t>
+            </a:r>
+            <a:endParaRPr lang="ko-KR" altLang="en-US" sz="2000" b="0" dirty="0">
+              <a:solidFill>
+                <a:srgbClr val="000000"/>
+              </a:solidFill>
+              <a:effectLst/>
+              <a:latin typeface="D2Coding" panose="020B0609020101020101" pitchFamily="49" charset="-127"/>
+              <a:ea typeface="D2Coding" panose="020B0609020101020101" pitchFamily="49" charset="-127"/>
+            </a:endParaRPr>
+          </a:p>
+          <a:p>
+            <a:pPr>
+              <a:buNone/>
+            </a:pPr>
+            <a:r>
+              <a:rPr lang="ko-KR" altLang="en-US" sz="2000" b="0" dirty="0">
+                <a:solidFill>
+                  <a:srgbClr val="000000"/>
+                </a:solidFill>
+                <a:effectLst/>
+                <a:latin typeface="D2Coding" panose="020B0609020101020101" pitchFamily="49" charset="-127"/>
+                <a:ea typeface="D2Coding" panose="020B0609020101020101" pitchFamily="49" charset="-127"/>
+              </a:rPr>
+              <a:t>    </a:t>
+            </a:r>
+            <a:r>
+              <a:rPr lang="en-US" altLang="ko-KR" sz="2000" b="0" dirty="0" err="1">
+                <a:solidFill>
+                  <a:srgbClr val="000000"/>
+                </a:solidFill>
+                <a:effectLst/>
+                <a:latin typeface="D2Coding" panose="020B0609020101020101" pitchFamily="49" charset="-127"/>
+                <a:ea typeface="D2Coding" panose="020B0609020101020101" pitchFamily="49" charset="-127"/>
+              </a:rPr>
+              <a:t>transforms.ColorJitter</a:t>
+            </a:r>
+            <a:r>
+              <a:rPr lang="en-US" altLang="ko-KR" sz="2000" b="0" dirty="0">
+                <a:solidFill>
+                  <a:srgbClr val="000000"/>
+                </a:solidFill>
+                <a:effectLst/>
+                <a:latin typeface="D2Coding" panose="020B0609020101020101" pitchFamily="49" charset="-127"/>
+                <a:ea typeface="D2Coding" panose="020B0609020101020101" pitchFamily="49" charset="-127"/>
+              </a:rPr>
+              <a:t>(brightness=</a:t>
+            </a:r>
+            <a:r>
+              <a:rPr lang="en-US" altLang="ko-KR" sz="2000" b="0" dirty="0">
+                <a:solidFill>
+                  <a:srgbClr val="098658"/>
+                </a:solidFill>
+                <a:effectLst/>
+                <a:latin typeface="D2Coding" panose="020B0609020101020101" pitchFamily="49" charset="-127"/>
+                <a:ea typeface="D2Coding" panose="020B0609020101020101" pitchFamily="49" charset="-127"/>
+              </a:rPr>
+              <a:t>0.3</a:t>
+            </a:r>
+            <a:r>
+              <a:rPr lang="en-US" altLang="ko-KR" sz="2000" b="0" dirty="0">
+                <a:solidFill>
+                  <a:srgbClr val="000000"/>
+                </a:solidFill>
+                <a:effectLst/>
+                <a:latin typeface="D2Coding" panose="020B0609020101020101" pitchFamily="49" charset="-127"/>
+                <a:ea typeface="D2Coding" panose="020B0609020101020101" pitchFamily="49" charset="-127"/>
+              </a:rPr>
+              <a:t>, </a:t>
+            </a:r>
+          </a:p>
+          <a:p>
+            <a:pPr>
+              <a:buNone/>
+            </a:pPr>
+            <a:r>
+              <a:rPr lang="en-US" altLang="ko-KR" sz="2000" dirty="0">
+                <a:solidFill>
+                  <a:srgbClr val="000000"/>
+                </a:solidFill>
+                <a:latin typeface="D2Coding" panose="020B0609020101020101" pitchFamily="49" charset="-127"/>
+                <a:ea typeface="D2Coding" panose="020B0609020101020101" pitchFamily="49" charset="-127"/>
+              </a:rPr>
+              <a:t>						</a:t>
+            </a:r>
+            <a:r>
+              <a:rPr lang="en-US" altLang="ko-KR" sz="2000" b="0" dirty="0">
+                <a:solidFill>
+                  <a:srgbClr val="000000"/>
+                </a:solidFill>
+                <a:effectLst/>
+                <a:latin typeface="D2Coding" panose="020B0609020101020101" pitchFamily="49" charset="-127"/>
+                <a:ea typeface="D2Coding" panose="020B0609020101020101" pitchFamily="49" charset="-127"/>
+              </a:rPr>
+              <a:t>contrast=</a:t>
+            </a:r>
+            <a:r>
+              <a:rPr lang="en-US" altLang="ko-KR" sz="2000" b="0" dirty="0">
+                <a:solidFill>
+                  <a:srgbClr val="098658"/>
+                </a:solidFill>
+                <a:effectLst/>
+                <a:latin typeface="D2Coding" panose="020B0609020101020101" pitchFamily="49" charset="-127"/>
+                <a:ea typeface="D2Coding" panose="020B0609020101020101" pitchFamily="49" charset="-127"/>
+              </a:rPr>
+              <a:t>0.3</a:t>
+            </a:r>
+            <a:r>
+              <a:rPr lang="en-US" altLang="ko-KR" sz="2000" b="0" dirty="0">
+                <a:solidFill>
+                  <a:srgbClr val="000000"/>
+                </a:solidFill>
+                <a:effectLst/>
+                <a:latin typeface="D2Coding" panose="020B0609020101020101" pitchFamily="49" charset="-127"/>
+                <a:ea typeface="D2Coding" panose="020B0609020101020101" pitchFamily="49" charset="-127"/>
+              </a:rPr>
+              <a:t>, saturation=</a:t>
+            </a:r>
+            <a:r>
+              <a:rPr lang="en-US" altLang="ko-KR" sz="2000" b="0" dirty="0">
+                <a:solidFill>
+                  <a:srgbClr val="098658"/>
+                </a:solidFill>
+                <a:effectLst/>
+                <a:latin typeface="D2Coding" panose="020B0609020101020101" pitchFamily="49" charset="-127"/>
+                <a:ea typeface="D2Coding" panose="020B0609020101020101" pitchFamily="49" charset="-127"/>
+              </a:rPr>
+              <a:t>0.2</a:t>
+            </a:r>
+            <a:r>
+              <a:rPr lang="en-US" altLang="ko-KR" sz="2000" b="0" dirty="0">
+                <a:solidFill>
+                  <a:srgbClr val="000000"/>
+                </a:solidFill>
+                <a:effectLst/>
+                <a:latin typeface="D2Coding" panose="020B0609020101020101" pitchFamily="49" charset="-127"/>
+                <a:ea typeface="D2Coding" panose="020B0609020101020101" pitchFamily="49" charset="-127"/>
+              </a:rPr>
+              <a:t>),</a:t>
+            </a:r>
+            <a:endParaRPr lang="ko-KR" altLang="en-US" sz="2000" b="0" dirty="0">
+              <a:solidFill>
+                <a:srgbClr val="000000"/>
+              </a:solidFill>
+              <a:effectLst/>
+              <a:latin typeface="D2Coding" panose="020B0609020101020101" pitchFamily="49" charset="-127"/>
+              <a:ea typeface="D2Coding" panose="020B0609020101020101" pitchFamily="49" charset="-127"/>
+            </a:endParaRPr>
+          </a:p>
+          <a:p>
+            <a:pPr>
+              <a:buNone/>
+            </a:pPr>
+            <a:r>
+              <a:rPr lang="ko-KR" altLang="en-US" sz="2000" b="0" dirty="0">
+                <a:solidFill>
+                  <a:srgbClr val="000000"/>
+                </a:solidFill>
+                <a:effectLst/>
+                <a:latin typeface="D2Coding" panose="020B0609020101020101" pitchFamily="49" charset="-127"/>
+                <a:ea typeface="D2Coding" panose="020B0609020101020101" pitchFamily="49" charset="-127"/>
+              </a:rPr>
+              <a:t>    </a:t>
+            </a:r>
+            <a:r>
+              <a:rPr lang="en-US" altLang="ko-KR" sz="2000" b="0" dirty="0" err="1">
+                <a:solidFill>
+                  <a:srgbClr val="000000"/>
+                </a:solidFill>
+                <a:effectLst/>
+                <a:latin typeface="D2Coding" panose="020B0609020101020101" pitchFamily="49" charset="-127"/>
+                <a:ea typeface="D2Coding" panose="020B0609020101020101" pitchFamily="49" charset="-127"/>
+              </a:rPr>
+              <a:t>transforms.RandomAffine</a:t>
+            </a:r>
+            <a:r>
+              <a:rPr lang="en-US" altLang="ko-KR" sz="2000" b="0" dirty="0">
+                <a:solidFill>
+                  <a:srgbClr val="000000"/>
+                </a:solidFill>
+                <a:effectLst/>
+                <a:latin typeface="D2Coding" panose="020B0609020101020101" pitchFamily="49" charset="-127"/>
+                <a:ea typeface="D2Coding" panose="020B0609020101020101" pitchFamily="49" charset="-127"/>
+              </a:rPr>
+              <a:t>(degrees=</a:t>
+            </a:r>
+            <a:r>
+              <a:rPr lang="en-US" altLang="ko-KR" sz="2000" b="0" dirty="0">
+                <a:solidFill>
+                  <a:srgbClr val="098658"/>
+                </a:solidFill>
+                <a:effectLst/>
+                <a:latin typeface="D2Coding" panose="020B0609020101020101" pitchFamily="49" charset="-127"/>
+                <a:ea typeface="D2Coding" panose="020B0609020101020101" pitchFamily="49" charset="-127"/>
+              </a:rPr>
+              <a:t>0</a:t>
+            </a:r>
+            <a:r>
+              <a:rPr lang="en-US" altLang="ko-KR" sz="2000" b="0" dirty="0">
+                <a:solidFill>
+                  <a:srgbClr val="000000"/>
+                </a:solidFill>
+                <a:effectLst/>
+                <a:latin typeface="D2Coding" panose="020B0609020101020101" pitchFamily="49" charset="-127"/>
+                <a:ea typeface="D2Coding" panose="020B0609020101020101" pitchFamily="49" charset="-127"/>
+              </a:rPr>
+              <a:t>, </a:t>
+            </a:r>
+          </a:p>
+          <a:p>
+            <a:pPr>
+              <a:buNone/>
+            </a:pPr>
+            <a:r>
+              <a:rPr lang="en-US" altLang="ko-KR" sz="2000" dirty="0">
+                <a:solidFill>
+                  <a:srgbClr val="000000"/>
+                </a:solidFill>
+                <a:latin typeface="D2Coding" panose="020B0609020101020101" pitchFamily="49" charset="-127"/>
+                <a:ea typeface="D2Coding" panose="020B0609020101020101" pitchFamily="49" charset="-127"/>
+              </a:rPr>
+              <a:t>						</a:t>
+            </a:r>
+            <a:r>
+              <a:rPr lang="en-US" altLang="ko-KR" sz="2000" b="0" dirty="0">
+                <a:solidFill>
+                  <a:srgbClr val="000000"/>
+                </a:solidFill>
+                <a:effectLst/>
+                <a:latin typeface="D2Coding" panose="020B0609020101020101" pitchFamily="49" charset="-127"/>
+                <a:ea typeface="D2Coding" panose="020B0609020101020101" pitchFamily="49" charset="-127"/>
+              </a:rPr>
+              <a:t>translate=(</a:t>
+            </a:r>
+            <a:r>
+              <a:rPr lang="en-US" altLang="ko-KR" sz="2000" b="0" dirty="0">
+                <a:solidFill>
+                  <a:srgbClr val="098658"/>
+                </a:solidFill>
+                <a:effectLst/>
+                <a:latin typeface="D2Coding" panose="020B0609020101020101" pitchFamily="49" charset="-127"/>
+                <a:ea typeface="D2Coding" panose="020B0609020101020101" pitchFamily="49" charset="-127"/>
+              </a:rPr>
+              <a:t>0.05</a:t>
+            </a:r>
+            <a:r>
+              <a:rPr lang="en-US" altLang="ko-KR" sz="2000" b="0" dirty="0">
+                <a:solidFill>
+                  <a:srgbClr val="000000"/>
+                </a:solidFill>
+                <a:effectLst/>
+                <a:latin typeface="D2Coding" panose="020B0609020101020101" pitchFamily="49" charset="-127"/>
+                <a:ea typeface="D2Coding" panose="020B0609020101020101" pitchFamily="49" charset="-127"/>
+              </a:rPr>
+              <a:t>, </a:t>
+            </a:r>
+            <a:r>
+              <a:rPr lang="en-US" altLang="ko-KR" sz="2000" b="0" dirty="0">
+                <a:solidFill>
+                  <a:srgbClr val="098658"/>
+                </a:solidFill>
+                <a:effectLst/>
+                <a:latin typeface="D2Coding" panose="020B0609020101020101" pitchFamily="49" charset="-127"/>
+                <a:ea typeface="D2Coding" panose="020B0609020101020101" pitchFamily="49" charset="-127"/>
+              </a:rPr>
+              <a:t>0.05</a:t>
+            </a:r>
+            <a:r>
+              <a:rPr lang="en-US" altLang="ko-KR" sz="2000" b="0" dirty="0">
+                <a:solidFill>
+                  <a:srgbClr val="000000"/>
+                </a:solidFill>
+                <a:effectLst/>
+                <a:latin typeface="D2Coding" panose="020B0609020101020101" pitchFamily="49" charset="-127"/>
+                <a:ea typeface="D2Coding" panose="020B0609020101020101" pitchFamily="49" charset="-127"/>
+              </a:rPr>
+              <a:t>)),</a:t>
+            </a:r>
+            <a:endParaRPr lang="ko-KR" altLang="en-US" sz="2000" b="0" dirty="0">
+              <a:solidFill>
+                <a:srgbClr val="000000"/>
+              </a:solidFill>
+              <a:effectLst/>
+              <a:latin typeface="D2Coding" panose="020B0609020101020101" pitchFamily="49" charset="-127"/>
+              <a:ea typeface="D2Coding" panose="020B0609020101020101" pitchFamily="49" charset="-127"/>
+            </a:endParaRPr>
+          </a:p>
+          <a:p>
+            <a:pPr>
+              <a:buNone/>
+            </a:pPr>
+            <a:r>
+              <a:rPr lang="ko-KR" altLang="en-US" sz="2000" b="0" dirty="0">
+                <a:solidFill>
+                  <a:srgbClr val="000000"/>
+                </a:solidFill>
+                <a:effectLst/>
+                <a:latin typeface="D2Coding" panose="020B0609020101020101" pitchFamily="49" charset="-127"/>
+                <a:ea typeface="D2Coding" panose="020B0609020101020101" pitchFamily="49" charset="-127"/>
+              </a:rPr>
+              <a:t>    </a:t>
+            </a:r>
+            <a:r>
+              <a:rPr lang="en-US" altLang="ko-KR" sz="2000" b="0" dirty="0" err="1">
+                <a:solidFill>
+                  <a:srgbClr val="000000"/>
+                </a:solidFill>
+                <a:effectLst/>
+                <a:latin typeface="D2Coding" panose="020B0609020101020101" pitchFamily="49" charset="-127"/>
+                <a:ea typeface="D2Coding" panose="020B0609020101020101" pitchFamily="49" charset="-127"/>
+              </a:rPr>
+              <a:t>transforms.ToTensor</a:t>
+            </a:r>
+            <a:r>
+              <a:rPr lang="en-US" altLang="ko-KR" sz="2000" b="0" dirty="0">
+                <a:solidFill>
+                  <a:srgbClr val="000000"/>
+                </a:solidFill>
+                <a:effectLst/>
+                <a:latin typeface="D2Coding" panose="020B0609020101020101" pitchFamily="49" charset="-127"/>
+                <a:ea typeface="D2Coding" panose="020B0609020101020101" pitchFamily="49" charset="-127"/>
+              </a:rPr>
+              <a:t>(),</a:t>
+            </a:r>
+          </a:p>
+          <a:p>
+            <a:pPr>
+              <a:buNone/>
+            </a:pPr>
+            <a:r>
+              <a:rPr lang="en-US" altLang="ko-KR" sz="2000" b="0" dirty="0">
+                <a:solidFill>
+                  <a:srgbClr val="000000"/>
+                </a:solidFill>
+                <a:effectLst/>
+                <a:latin typeface="D2Coding" panose="020B0609020101020101" pitchFamily="49" charset="-127"/>
+                <a:ea typeface="D2Coding" panose="020B0609020101020101" pitchFamily="49" charset="-127"/>
+              </a:rPr>
+              <a:t>    </a:t>
+            </a:r>
+            <a:r>
+              <a:rPr lang="en-US" altLang="ko-KR" sz="2000" b="0" dirty="0" err="1">
+                <a:solidFill>
+                  <a:srgbClr val="000000"/>
+                </a:solidFill>
+                <a:effectLst/>
+                <a:latin typeface="D2Coding" panose="020B0609020101020101" pitchFamily="49" charset="-127"/>
+                <a:ea typeface="D2Coding" panose="020B0609020101020101" pitchFamily="49" charset="-127"/>
+              </a:rPr>
+              <a:t>transforms.Normalize</a:t>
+            </a:r>
+            <a:r>
+              <a:rPr lang="en-US" altLang="ko-KR" sz="2000" b="0" dirty="0">
+                <a:solidFill>
+                  <a:srgbClr val="000000"/>
+                </a:solidFill>
+                <a:effectLst/>
+                <a:latin typeface="D2Coding" panose="020B0609020101020101" pitchFamily="49" charset="-127"/>
+                <a:ea typeface="D2Coding" panose="020B0609020101020101" pitchFamily="49" charset="-127"/>
+              </a:rPr>
+              <a:t>(mean=[</a:t>
+            </a:r>
+            <a:r>
+              <a:rPr lang="en-US" altLang="ko-KR" sz="2000" b="0" dirty="0">
+                <a:solidFill>
+                  <a:srgbClr val="098658"/>
+                </a:solidFill>
+                <a:effectLst/>
+                <a:latin typeface="D2Coding" panose="020B0609020101020101" pitchFamily="49" charset="-127"/>
+                <a:ea typeface="D2Coding" panose="020B0609020101020101" pitchFamily="49" charset="-127"/>
+              </a:rPr>
+              <a:t>0.485</a:t>
+            </a:r>
+            <a:r>
+              <a:rPr lang="en-US" altLang="ko-KR" sz="2000" b="0" dirty="0">
+                <a:solidFill>
+                  <a:srgbClr val="000000"/>
+                </a:solidFill>
+                <a:effectLst/>
+                <a:latin typeface="D2Coding" panose="020B0609020101020101" pitchFamily="49" charset="-127"/>
+                <a:ea typeface="D2Coding" panose="020B0609020101020101" pitchFamily="49" charset="-127"/>
+              </a:rPr>
+              <a:t>, </a:t>
+            </a:r>
+            <a:r>
+              <a:rPr lang="en-US" altLang="ko-KR" sz="2000" b="0" dirty="0">
+                <a:solidFill>
+                  <a:srgbClr val="098658"/>
+                </a:solidFill>
+                <a:effectLst/>
+                <a:latin typeface="D2Coding" panose="020B0609020101020101" pitchFamily="49" charset="-127"/>
+                <a:ea typeface="D2Coding" panose="020B0609020101020101" pitchFamily="49" charset="-127"/>
+              </a:rPr>
+              <a:t>0.456</a:t>
+            </a:r>
+            <a:r>
+              <a:rPr lang="en-US" altLang="ko-KR" sz="2000" b="0" dirty="0">
+                <a:solidFill>
+                  <a:srgbClr val="000000"/>
+                </a:solidFill>
+                <a:effectLst/>
+                <a:latin typeface="D2Coding" panose="020B0609020101020101" pitchFamily="49" charset="-127"/>
+                <a:ea typeface="D2Coding" panose="020B0609020101020101" pitchFamily="49" charset="-127"/>
+              </a:rPr>
+              <a:t>, </a:t>
+            </a:r>
+            <a:r>
+              <a:rPr lang="en-US" altLang="ko-KR" sz="2000" b="0" dirty="0">
+                <a:solidFill>
+                  <a:srgbClr val="098658"/>
+                </a:solidFill>
+                <a:effectLst/>
+                <a:latin typeface="D2Coding" panose="020B0609020101020101" pitchFamily="49" charset="-127"/>
+                <a:ea typeface="D2Coding" panose="020B0609020101020101" pitchFamily="49" charset="-127"/>
+              </a:rPr>
+              <a:t>0.406</a:t>
+            </a:r>
+            <a:r>
+              <a:rPr lang="en-US" altLang="ko-KR" sz="2000" b="0" dirty="0">
+                <a:solidFill>
+                  <a:srgbClr val="000000"/>
+                </a:solidFill>
+                <a:effectLst/>
+                <a:latin typeface="D2Coding" panose="020B0609020101020101" pitchFamily="49" charset="-127"/>
+                <a:ea typeface="D2Coding" panose="020B0609020101020101" pitchFamily="49" charset="-127"/>
+              </a:rPr>
+              <a:t>],</a:t>
+            </a:r>
+          </a:p>
+          <a:p>
+            <a:pPr>
+              <a:buNone/>
+            </a:pPr>
+            <a:r>
+              <a:rPr lang="ko-KR" altLang="en-US" sz="2000" dirty="0">
+                <a:solidFill>
+                  <a:srgbClr val="000000"/>
+                </a:solidFill>
+                <a:latin typeface="D2Coding" panose="020B0609020101020101" pitchFamily="49" charset="-127"/>
+                <a:ea typeface="D2Coding" panose="020B0609020101020101" pitchFamily="49" charset="-127"/>
+              </a:rPr>
+              <a:t> </a:t>
+            </a:r>
+            <a:r>
+              <a:rPr lang="en-US" altLang="ko-KR" sz="2000" dirty="0">
+                <a:solidFill>
+                  <a:srgbClr val="000000"/>
+                </a:solidFill>
+                <a:latin typeface="D2Coding" panose="020B0609020101020101" pitchFamily="49" charset="-127"/>
+                <a:ea typeface="D2Coding" panose="020B0609020101020101" pitchFamily="49" charset="-127"/>
+              </a:rPr>
+              <a:t>						</a:t>
+            </a:r>
+            <a:r>
+              <a:rPr lang="en-US" altLang="ko-KR" sz="2000" b="0" dirty="0">
+                <a:solidFill>
+                  <a:srgbClr val="000000"/>
+                </a:solidFill>
+                <a:effectLst/>
+                <a:latin typeface="D2Coding" panose="020B0609020101020101" pitchFamily="49" charset="-127"/>
+                <a:ea typeface="D2Coding" panose="020B0609020101020101" pitchFamily="49" charset="-127"/>
+              </a:rPr>
+              <a:t>std=[</a:t>
+            </a:r>
+            <a:r>
+              <a:rPr lang="en-US" altLang="ko-KR" sz="2000" b="0" dirty="0">
+                <a:solidFill>
+                  <a:srgbClr val="098658"/>
+                </a:solidFill>
+                <a:effectLst/>
+                <a:latin typeface="D2Coding" panose="020B0609020101020101" pitchFamily="49" charset="-127"/>
+                <a:ea typeface="D2Coding" panose="020B0609020101020101" pitchFamily="49" charset="-127"/>
+              </a:rPr>
+              <a:t>0.229</a:t>
+            </a:r>
+            <a:r>
+              <a:rPr lang="en-US" altLang="ko-KR" sz="2000" b="0" dirty="0">
+                <a:solidFill>
+                  <a:srgbClr val="000000"/>
+                </a:solidFill>
+                <a:effectLst/>
+                <a:latin typeface="D2Coding" panose="020B0609020101020101" pitchFamily="49" charset="-127"/>
+                <a:ea typeface="D2Coding" panose="020B0609020101020101" pitchFamily="49" charset="-127"/>
+              </a:rPr>
+              <a:t>, </a:t>
+            </a:r>
+            <a:r>
+              <a:rPr lang="en-US" altLang="ko-KR" sz="2000" b="0" dirty="0">
+                <a:solidFill>
+                  <a:srgbClr val="098658"/>
+                </a:solidFill>
+                <a:effectLst/>
+                <a:latin typeface="D2Coding" panose="020B0609020101020101" pitchFamily="49" charset="-127"/>
+                <a:ea typeface="D2Coding" panose="020B0609020101020101" pitchFamily="49" charset="-127"/>
+              </a:rPr>
+              <a:t>0.224</a:t>
+            </a:r>
+            <a:r>
+              <a:rPr lang="en-US" altLang="ko-KR" sz="2000" b="0" dirty="0">
+                <a:solidFill>
+                  <a:srgbClr val="000000"/>
+                </a:solidFill>
+                <a:effectLst/>
+                <a:latin typeface="D2Coding" panose="020B0609020101020101" pitchFamily="49" charset="-127"/>
+                <a:ea typeface="D2Coding" panose="020B0609020101020101" pitchFamily="49" charset="-127"/>
+              </a:rPr>
+              <a:t>, </a:t>
+            </a:r>
+            <a:r>
+              <a:rPr lang="en-US" altLang="ko-KR" sz="2000" b="0" dirty="0">
+                <a:solidFill>
+                  <a:srgbClr val="098658"/>
+                </a:solidFill>
+                <a:effectLst/>
+                <a:latin typeface="D2Coding" panose="020B0609020101020101" pitchFamily="49" charset="-127"/>
+                <a:ea typeface="D2Coding" panose="020B0609020101020101" pitchFamily="49" charset="-127"/>
+              </a:rPr>
+              <a:t>0.225</a:t>
+            </a:r>
+            <a:r>
+              <a:rPr lang="en-US" altLang="ko-KR" sz="2000" b="0" dirty="0">
+                <a:solidFill>
+                  <a:srgbClr val="000000"/>
+                </a:solidFill>
+                <a:effectLst/>
+                <a:latin typeface="D2Coding" panose="020B0609020101020101" pitchFamily="49" charset="-127"/>
+                <a:ea typeface="D2Coding" panose="020B0609020101020101" pitchFamily="49" charset="-127"/>
+              </a:rPr>
+              <a:t>]),])</a:t>
+            </a:r>
+          </a:p>
+          <a:p>
+            <a:pPr>
+              <a:buNone/>
+            </a:pPr>
+            <a:br>
+              <a:rPr lang="en-US" altLang="ko-KR" sz="2200" b="0" dirty="0">
+                <a:solidFill>
+                  <a:srgbClr val="000000"/>
+                </a:solidFill>
+                <a:effectLst/>
+                <a:latin typeface="D2Coding" panose="020B0609020101020101" pitchFamily="49" charset="-127"/>
+                <a:ea typeface="D2Coding" panose="020B0609020101020101" pitchFamily="49" charset="-127"/>
+              </a:rPr>
+            </a:br>
+            <a:endParaRPr lang="en-US" altLang="ko-KR" sz="2200" b="0" dirty="0">
+              <a:solidFill>
+                <a:srgbClr val="000000"/>
+              </a:solidFill>
+              <a:effectLst/>
+              <a:latin typeface="D2Coding" panose="020B0609020101020101" pitchFamily="49" charset="-127"/>
+              <a:ea typeface="D2Coding" panose="020B0609020101020101" pitchFamily="49" charset="-127"/>
+            </a:endParaRPr>
+          </a:p>
+        </p:txBody>
+      </p:sp>
+      <p:sp>
+        <p:nvSpPr>
+          <p:cNvPr id="62" name="TextBox 61">
+            <a:extLst>
+              <a:ext uri="{FF2B5EF4-FFF2-40B4-BE49-F238E27FC236}">
+                <a16:creationId xmlns:a16="http://schemas.microsoft.com/office/drawing/2014/main" id="{214B5E3F-9537-8586-1159-C29A5BD3AEA8}"/>
+              </a:ext>
+            </a:extLst>
+          </p:cNvPr>
+          <p:cNvSpPr txBox="1"/>
+          <p:nvPr/>
+        </p:nvSpPr>
+        <p:spPr>
+          <a:xfrm>
+            <a:off x="10691809" y="10575361"/>
+            <a:ext cx="10710152" cy="1061829"/>
+          </a:xfrm>
+          <a:prstGeom prst="rect">
+            <a:avLst/>
+          </a:prstGeom>
+          <a:noFill/>
+        </p:spPr>
+        <p:txBody>
+          <a:bodyPr wrap="square">
+            <a:spAutoFit/>
+          </a:bodyPr>
+          <a:lstStyle/>
+          <a:p>
+            <a:pPr>
+              <a:buNone/>
+            </a:pPr>
+            <a:r>
+              <a:rPr lang="en-US" altLang="ko-KR" sz="2100" b="0" dirty="0" err="1">
+                <a:solidFill>
+                  <a:srgbClr val="000000"/>
+                </a:solidFill>
+                <a:effectLst/>
+                <a:latin typeface="D2Coding" panose="020B0609020101020101" pitchFamily="49" charset="-127"/>
+                <a:ea typeface="D2Coding" panose="020B0609020101020101" pitchFamily="49" charset="-127"/>
+              </a:rPr>
+              <a:t>e_model</a:t>
+            </a:r>
+            <a:r>
+              <a:rPr lang="en-US" altLang="ko-KR" sz="2100" b="0" dirty="0">
+                <a:solidFill>
+                  <a:srgbClr val="000000"/>
+                </a:solidFill>
+                <a:effectLst/>
+                <a:latin typeface="D2Coding" panose="020B0609020101020101" pitchFamily="49" charset="-127"/>
+                <a:ea typeface="D2Coding" panose="020B0609020101020101" pitchFamily="49" charset="-127"/>
+              </a:rPr>
+              <a:t> = efficientnet_b0(weights=EfficientNet_B0_Weights.</a:t>
+            </a:r>
+            <a:r>
+              <a:rPr lang="en-US" altLang="ko-KR" sz="2100" b="0" dirty="0">
+                <a:solidFill>
+                  <a:srgbClr val="098658"/>
+                </a:solidFill>
+                <a:effectLst/>
+                <a:latin typeface="D2Coding" panose="020B0609020101020101" pitchFamily="49" charset="-127"/>
+                <a:ea typeface="D2Coding" panose="020B0609020101020101" pitchFamily="49" charset="-127"/>
+              </a:rPr>
+              <a:t>IMAGENET1K_V1</a:t>
+            </a:r>
+            <a:r>
+              <a:rPr lang="en-US" altLang="ko-KR" sz="2100" b="0" dirty="0">
+                <a:solidFill>
+                  <a:srgbClr val="000000"/>
+                </a:solidFill>
+                <a:effectLst/>
+                <a:latin typeface="D2Coding" panose="020B0609020101020101" pitchFamily="49" charset="-127"/>
+                <a:ea typeface="D2Coding" panose="020B0609020101020101" pitchFamily="49" charset="-127"/>
+              </a:rPr>
+              <a:t>)</a:t>
+            </a:r>
+            <a:br>
+              <a:rPr lang="en-US" altLang="ko-KR" sz="2100" b="0" dirty="0">
+                <a:solidFill>
+                  <a:srgbClr val="000000"/>
+                </a:solidFill>
+                <a:effectLst/>
+                <a:latin typeface="D2Coding" panose="020B0609020101020101" pitchFamily="49" charset="-127"/>
+                <a:ea typeface="D2Coding" panose="020B0609020101020101" pitchFamily="49" charset="-127"/>
+              </a:rPr>
+            </a:br>
+            <a:r>
+              <a:rPr lang="en-US" altLang="ko-KR" sz="2100" b="0" dirty="0" err="1">
+                <a:solidFill>
+                  <a:srgbClr val="000000"/>
+                </a:solidFill>
+                <a:effectLst/>
+                <a:latin typeface="D2Coding" panose="020B0609020101020101" pitchFamily="49" charset="-127"/>
+                <a:ea typeface="D2Coding" panose="020B0609020101020101" pitchFamily="49" charset="-127"/>
+              </a:rPr>
+              <a:t>in_features</a:t>
+            </a:r>
+            <a:r>
+              <a:rPr lang="en-US" altLang="ko-KR" sz="2100" b="0" dirty="0">
+                <a:solidFill>
+                  <a:srgbClr val="000000"/>
+                </a:solidFill>
+                <a:effectLst/>
+                <a:latin typeface="D2Coding" panose="020B0609020101020101" pitchFamily="49" charset="-127"/>
+                <a:ea typeface="D2Coding" panose="020B0609020101020101" pitchFamily="49" charset="-127"/>
+              </a:rPr>
+              <a:t> = </a:t>
+            </a:r>
+            <a:r>
+              <a:rPr lang="en-US" altLang="ko-KR" sz="2100" b="0" dirty="0" err="1">
+                <a:solidFill>
+                  <a:srgbClr val="000000"/>
+                </a:solidFill>
+                <a:effectLst/>
+                <a:latin typeface="D2Coding" panose="020B0609020101020101" pitchFamily="49" charset="-127"/>
+                <a:ea typeface="D2Coding" panose="020B0609020101020101" pitchFamily="49" charset="-127"/>
+              </a:rPr>
+              <a:t>e_model.classifier</a:t>
+            </a:r>
+            <a:r>
+              <a:rPr lang="en-US" altLang="ko-KR" sz="2100" b="0" dirty="0">
+                <a:solidFill>
+                  <a:srgbClr val="000000"/>
+                </a:solidFill>
+                <a:effectLst/>
+                <a:latin typeface="D2Coding" panose="020B0609020101020101" pitchFamily="49" charset="-127"/>
+                <a:ea typeface="D2Coding" panose="020B0609020101020101" pitchFamily="49" charset="-127"/>
+              </a:rPr>
+              <a:t>[</a:t>
+            </a:r>
+            <a:r>
+              <a:rPr lang="en-US" altLang="ko-KR" sz="2100" b="0" dirty="0">
+                <a:solidFill>
+                  <a:srgbClr val="098658"/>
+                </a:solidFill>
+                <a:effectLst/>
+                <a:latin typeface="D2Coding" panose="020B0609020101020101" pitchFamily="49" charset="-127"/>
+                <a:ea typeface="D2Coding" panose="020B0609020101020101" pitchFamily="49" charset="-127"/>
+              </a:rPr>
+              <a:t>1</a:t>
+            </a:r>
+            <a:r>
+              <a:rPr lang="en-US" altLang="ko-KR" sz="2100" b="0" dirty="0">
+                <a:solidFill>
+                  <a:srgbClr val="000000"/>
+                </a:solidFill>
+                <a:effectLst/>
+                <a:latin typeface="D2Coding" panose="020B0609020101020101" pitchFamily="49" charset="-127"/>
+                <a:ea typeface="D2Coding" panose="020B0609020101020101" pitchFamily="49" charset="-127"/>
+              </a:rPr>
+              <a:t>].</a:t>
+            </a:r>
+            <a:r>
+              <a:rPr lang="en-US" altLang="ko-KR" sz="2100" b="0" dirty="0" err="1">
+                <a:solidFill>
+                  <a:srgbClr val="000000"/>
+                </a:solidFill>
+                <a:effectLst/>
+                <a:latin typeface="D2Coding" panose="020B0609020101020101" pitchFamily="49" charset="-127"/>
+                <a:ea typeface="D2Coding" panose="020B0609020101020101" pitchFamily="49" charset="-127"/>
+              </a:rPr>
+              <a:t>in_features</a:t>
+            </a:r>
+            <a:endParaRPr lang="en-US" altLang="ko-KR" sz="2100" b="0" dirty="0">
+              <a:solidFill>
+                <a:srgbClr val="000000"/>
+              </a:solidFill>
+              <a:effectLst/>
+              <a:latin typeface="D2Coding" panose="020B0609020101020101" pitchFamily="49" charset="-127"/>
+              <a:ea typeface="D2Coding" panose="020B0609020101020101" pitchFamily="49" charset="-127"/>
+            </a:endParaRPr>
+          </a:p>
+          <a:p>
+            <a:pPr>
+              <a:buNone/>
+            </a:pPr>
+            <a:r>
+              <a:rPr lang="en-US" altLang="ko-KR" sz="2100" b="0" dirty="0" err="1">
+                <a:solidFill>
+                  <a:srgbClr val="000000"/>
+                </a:solidFill>
+                <a:effectLst/>
+                <a:latin typeface="D2Coding" panose="020B0609020101020101" pitchFamily="49" charset="-127"/>
+                <a:ea typeface="D2Coding" panose="020B0609020101020101" pitchFamily="49" charset="-127"/>
+              </a:rPr>
+              <a:t>e_model.classifier</a:t>
+            </a:r>
+            <a:r>
+              <a:rPr lang="en-US" altLang="ko-KR" sz="2100" b="0" dirty="0">
+                <a:solidFill>
+                  <a:srgbClr val="000000"/>
+                </a:solidFill>
+                <a:effectLst/>
+                <a:latin typeface="D2Coding" panose="020B0609020101020101" pitchFamily="49" charset="-127"/>
+                <a:ea typeface="D2Coding" panose="020B0609020101020101" pitchFamily="49" charset="-127"/>
+              </a:rPr>
+              <a:t>[</a:t>
+            </a:r>
+            <a:r>
+              <a:rPr lang="en-US" altLang="ko-KR" sz="2100" b="0" dirty="0">
+                <a:solidFill>
+                  <a:srgbClr val="098658"/>
+                </a:solidFill>
+                <a:effectLst/>
+                <a:latin typeface="D2Coding" panose="020B0609020101020101" pitchFamily="49" charset="-127"/>
+                <a:ea typeface="D2Coding" panose="020B0609020101020101" pitchFamily="49" charset="-127"/>
+              </a:rPr>
+              <a:t>1</a:t>
+            </a:r>
+            <a:r>
+              <a:rPr lang="en-US" altLang="ko-KR" sz="2100" b="0" dirty="0">
+                <a:solidFill>
+                  <a:srgbClr val="000000"/>
+                </a:solidFill>
+                <a:effectLst/>
+                <a:latin typeface="D2Coding" panose="020B0609020101020101" pitchFamily="49" charset="-127"/>
+                <a:ea typeface="D2Coding" panose="020B0609020101020101" pitchFamily="49" charset="-127"/>
+              </a:rPr>
+              <a:t>] = </a:t>
+            </a:r>
+            <a:r>
+              <a:rPr lang="en-US" altLang="ko-KR" sz="2100" b="0" dirty="0" err="1">
+                <a:solidFill>
+                  <a:srgbClr val="000000"/>
+                </a:solidFill>
+                <a:effectLst/>
+                <a:latin typeface="D2Coding" panose="020B0609020101020101" pitchFamily="49" charset="-127"/>
+                <a:ea typeface="D2Coding" panose="020B0609020101020101" pitchFamily="49" charset="-127"/>
+              </a:rPr>
+              <a:t>nn.Linear</a:t>
+            </a:r>
+            <a:r>
+              <a:rPr lang="en-US" altLang="ko-KR" sz="2100" b="0" dirty="0">
+                <a:solidFill>
+                  <a:srgbClr val="000000"/>
+                </a:solidFill>
+                <a:effectLst/>
+                <a:latin typeface="D2Coding" panose="020B0609020101020101" pitchFamily="49" charset="-127"/>
+                <a:ea typeface="D2Coding" panose="020B0609020101020101" pitchFamily="49" charset="-127"/>
+              </a:rPr>
+              <a:t>(</a:t>
+            </a:r>
+            <a:r>
+              <a:rPr lang="en-US" altLang="ko-KR" sz="2100" b="0" dirty="0" err="1">
+                <a:solidFill>
+                  <a:srgbClr val="000000"/>
+                </a:solidFill>
+                <a:effectLst/>
+                <a:latin typeface="D2Coding" panose="020B0609020101020101" pitchFamily="49" charset="-127"/>
+                <a:ea typeface="D2Coding" panose="020B0609020101020101" pitchFamily="49" charset="-127"/>
+              </a:rPr>
+              <a:t>in_features</a:t>
+            </a:r>
+            <a:r>
+              <a:rPr lang="en-US" altLang="ko-KR" sz="2100" b="0" dirty="0">
+                <a:solidFill>
+                  <a:srgbClr val="000000"/>
+                </a:solidFill>
+                <a:effectLst/>
+                <a:latin typeface="D2Coding" panose="020B0609020101020101" pitchFamily="49" charset="-127"/>
+                <a:ea typeface="D2Coding" panose="020B0609020101020101" pitchFamily="49" charset="-127"/>
+              </a:rPr>
+              <a:t>, </a:t>
+            </a:r>
+            <a:r>
+              <a:rPr lang="en-US" altLang="ko-KR" sz="2100" b="0" dirty="0">
+                <a:solidFill>
+                  <a:srgbClr val="098658"/>
+                </a:solidFill>
+                <a:effectLst/>
+                <a:latin typeface="D2Coding" panose="020B0609020101020101" pitchFamily="49" charset="-127"/>
+                <a:ea typeface="D2Coding" panose="020B0609020101020101" pitchFamily="49" charset="-127"/>
+              </a:rPr>
+              <a:t>2</a:t>
+            </a:r>
+            <a:r>
+              <a:rPr lang="en-US" altLang="ko-KR" sz="2100" b="0" dirty="0">
+                <a:solidFill>
+                  <a:srgbClr val="000000"/>
+                </a:solidFill>
+                <a:effectLst/>
+                <a:latin typeface="D2Coding" panose="020B0609020101020101" pitchFamily="49" charset="-127"/>
+                <a:ea typeface="D2Coding" panose="020B0609020101020101" pitchFamily="49" charset="-127"/>
+              </a:rPr>
+              <a:t>)</a:t>
+            </a:r>
           </a:p>
         </p:txBody>
       </p:sp>
